--- a/SLAY Tree💅🏻.pptx
+++ b/SLAY Tree💅🏻.pptx
@@ -8,6 +8,24 @@
     <p:sldId id="256" r:id="rId2"/>
     <p:sldId id="257" r:id="rId3"/>
     <p:sldId id="258" r:id="rId4"/>
+    <p:sldId id="259" r:id="rId5"/>
+    <p:sldId id="260" r:id="rId6"/>
+    <p:sldId id="262" r:id="rId7"/>
+    <p:sldId id="273" r:id="rId8"/>
+    <p:sldId id="274" r:id="rId9"/>
+    <p:sldId id="275" r:id="rId10"/>
+    <p:sldId id="264" r:id="rId11"/>
+    <p:sldId id="265" r:id="rId12"/>
+    <p:sldId id="266" r:id="rId13"/>
+    <p:sldId id="267" r:id="rId14"/>
+    <p:sldId id="268" r:id="rId15"/>
+    <p:sldId id="269" r:id="rId16"/>
+    <p:sldId id="261" r:id="rId17"/>
+    <p:sldId id="272" r:id="rId18"/>
+    <p:sldId id="271" r:id="rId19"/>
+    <p:sldId id="276" r:id="rId20"/>
+    <p:sldId id="263" r:id="rId21"/>
+    <p:sldId id="270" r:id="rId22"/>
   </p:sldIdLst>
   <p:sldSz cx="12192000" cy="6858000"/>
   <p:notesSz cx="6858000" cy="9144000"/>
@@ -263,7 +281,7 @@
           <a:p>
             <a:fld id="{76969C88-B244-455D-A017-012B25B1ACDD}" type="datetimeFigureOut">
               <a:rPr lang="en-US" smtClean="0"/>
-              <a:t>5/11/2026</a:t>
+              <a:t>5/12/2026</a:t>
             </a:fld>
             <a:endParaRPr lang="en-US"/>
           </a:p>
@@ -463,7 +481,7 @@
           <a:p>
             <a:fld id="{76969C88-B244-455D-A017-012B25B1ACDD}" type="datetimeFigureOut">
               <a:rPr lang="en-US" smtClean="0"/>
-              <a:t>5/11/2026</a:t>
+              <a:t>5/12/2026</a:t>
             </a:fld>
             <a:endParaRPr lang="en-US"/>
           </a:p>
@@ -673,7 +691,7 @@
           <a:p>
             <a:fld id="{76969C88-B244-455D-A017-012B25B1ACDD}" type="datetimeFigureOut">
               <a:rPr lang="en-US" smtClean="0"/>
-              <a:t>5/11/2026</a:t>
+              <a:t>5/12/2026</a:t>
             </a:fld>
             <a:endParaRPr lang="en-US"/>
           </a:p>
@@ -873,7 +891,7 @@
           <a:p>
             <a:fld id="{76969C88-B244-455D-A017-012B25B1ACDD}" type="datetimeFigureOut">
               <a:rPr lang="en-US" smtClean="0"/>
-              <a:t>5/11/2026</a:t>
+              <a:t>5/12/2026</a:t>
             </a:fld>
             <a:endParaRPr lang="en-US"/>
           </a:p>
@@ -1149,7 +1167,7 @@
           <a:p>
             <a:fld id="{76969C88-B244-455D-A017-012B25B1ACDD}" type="datetimeFigureOut">
               <a:rPr lang="en-US" smtClean="0"/>
-              <a:t>5/11/2026</a:t>
+              <a:t>5/12/2026</a:t>
             </a:fld>
             <a:endParaRPr lang="en-US"/>
           </a:p>
@@ -1417,7 +1435,7 @@
           <a:p>
             <a:fld id="{76969C88-B244-455D-A017-012B25B1ACDD}" type="datetimeFigureOut">
               <a:rPr lang="en-US" smtClean="0"/>
-              <a:t>5/11/2026</a:t>
+              <a:t>5/12/2026</a:t>
             </a:fld>
             <a:endParaRPr lang="en-US"/>
           </a:p>
@@ -1832,7 +1850,7 @@
           <a:p>
             <a:fld id="{76969C88-B244-455D-A017-012B25B1ACDD}" type="datetimeFigureOut">
               <a:rPr lang="en-US" smtClean="0"/>
-              <a:t>5/11/2026</a:t>
+              <a:t>5/12/2026</a:t>
             </a:fld>
             <a:endParaRPr lang="en-US"/>
           </a:p>
@@ -1974,7 +1992,7 @@
           <a:p>
             <a:fld id="{76969C88-B244-455D-A017-012B25B1ACDD}" type="datetimeFigureOut">
               <a:rPr lang="en-US" smtClean="0"/>
-              <a:t>5/11/2026</a:t>
+              <a:t>5/12/2026</a:t>
             </a:fld>
             <a:endParaRPr lang="en-US"/>
           </a:p>
@@ -2087,7 +2105,7 @@
           <a:p>
             <a:fld id="{76969C88-B244-455D-A017-012B25B1ACDD}" type="datetimeFigureOut">
               <a:rPr lang="en-US" smtClean="0"/>
-              <a:t>5/11/2026</a:t>
+              <a:t>5/12/2026</a:t>
             </a:fld>
             <a:endParaRPr lang="en-US"/>
           </a:p>
@@ -2400,7 +2418,7 @@
           <a:p>
             <a:fld id="{76969C88-B244-455D-A017-012B25B1ACDD}" type="datetimeFigureOut">
               <a:rPr lang="en-US" smtClean="0"/>
-              <a:t>5/11/2026</a:t>
+              <a:t>5/12/2026</a:t>
             </a:fld>
             <a:endParaRPr lang="en-US"/>
           </a:p>
@@ -2693,7 +2711,7 @@
           <a:p>
             <a:fld id="{76969C88-B244-455D-A017-012B25B1ACDD}" type="datetimeFigureOut">
               <a:rPr lang="en-US" smtClean="0"/>
-              <a:t>5/11/2026</a:t>
+              <a:t>5/12/2026</a:t>
             </a:fld>
             <a:endParaRPr lang="en-US"/>
           </a:p>
@@ -2770,9 +2788,12 @@
 <p:sldMaster xmlns:a="http://schemas.openxmlformats.org/drawingml/2006/main" xmlns:r="http://schemas.openxmlformats.org/officeDocument/2006/relationships" xmlns:p="http://schemas.openxmlformats.org/presentationml/2006/main">
   <p:cSld>
     <p:bg>
-      <p:bgRef idx="1001">
-        <a:schemeClr val="bg2"/>
-      </p:bgRef>
+      <p:bgPr>
+        <a:solidFill>
+          <a:srgbClr val="FF33CC"/>
+        </a:solidFill>
+        <a:effectLst/>
+      </p:bgPr>
     </p:bg>
     <p:spTree>
       <p:nvGrpSpPr>
@@ -3449,7 +3470,7 @@
             <a:fld id="{76969C88-B244-455D-A017-012B25B1ACDD}" type="datetimeFigureOut">
               <a:rPr lang="en-US" smtClean="0"/>
               <a:pPr/>
-              <a:t>5/11/2026</a:t>
+              <a:t>5/12/2026</a:t>
             </a:fld>
             <a:endParaRPr lang="en-US"/>
           </a:p>
@@ -4092,8 +4113,17 @@
           <a:p>
             <a:r>
               <a:rPr lang="ru-RU" dirty="0"/>
-              <a:t>Расширяющееся дерево</a:t>
-            </a:r>
+              <a:t>Расширяющееся дерево </a:t>
+            </a:r>
+            <a:r>
+              <a:rPr lang="en-US" dirty="0" err="1"/>
+              <a:t>Swagteev</a:t>
+            </a:r>
+            <a:r>
+              <a:rPr lang="en-US" dirty="0"/>
+              <a:t> Arseniy</a:t>
+            </a:r>
+            <a:endParaRPr lang="ru-RU" dirty="0"/>
           </a:p>
         </p:txBody>
       </p:sp>
@@ -4101,6 +4131,1392 @@
     <p:extLst>
       <p:ext uri="{BB962C8B-B14F-4D97-AF65-F5344CB8AC3E}">
         <p14:creationId xmlns:p14="http://schemas.microsoft.com/office/powerpoint/2010/main" val="3162764784"/>
+      </p:ext>
+    </p:extLst>
+  </p:cSld>
+  <p:clrMapOvr>
+    <a:masterClrMapping/>
+  </p:clrMapOvr>
+</p:sld>
+</file>
+
+<file path=ppt/slides/slide10.xml><?xml version="1.0" encoding="utf-8"?>
+<p:sld xmlns:a="http://schemas.openxmlformats.org/drawingml/2006/main" xmlns:r="http://schemas.openxmlformats.org/officeDocument/2006/relationships" xmlns:p="http://schemas.openxmlformats.org/presentationml/2006/main">
+  <p:cSld>
+    <p:spTree>
+      <p:nvGrpSpPr>
+        <p:cNvPr id="1" name=""/>
+        <p:cNvGrpSpPr/>
+        <p:nvPr/>
+      </p:nvGrpSpPr>
+      <p:grpSpPr>
+        <a:xfrm>
+          <a:off x="0" y="0"/>
+          <a:ext cx="0" cy="0"/>
+          <a:chOff x="0" y="0"/>
+          <a:chExt cx="0" cy="0"/>
+        </a:xfrm>
+      </p:grpSpPr>
+      <p:sp>
+        <p:nvSpPr>
+          <p:cNvPr id="2" name="Заголовок 1">
+            <a:extLst>
+              <a:ext uri="{FF2B5EF4-FFF2-40B4-BE49-F238E27FC236}">
+                <a16:creationId xmlns:a16="http://schemas.microsoft.com/office/drawing/2014/main" id="{0BC91337-0330-42C3-A37C-198659EBFDB0}"/>
+              </a:ext>
+            </a:extLst>
+          </p:cNvPr>
+          <p:cNvSpPr>
+            <a:spLocks noGrp="1"/>
+          </p:cNvSpPr>
+          <p:nvPr>
+            <p:ph type="title"/>
+          </p:nvPr>
+        </p:nvSpPr>
+        <p:spPr/>
+        <p:txBody>
+          <a:bodyPr/>
+          <a:lstStyle/>
+          <a:p>
+            <a:endParaRPr lang="ru-RU"/>
+          </a:p>
+        </p:txBody>
+      </p:sp>
+      <p:pic>
+        <p:nvPicPr>
+          <p:cNvPr id="5" name="Объект 4">
+            <a:extLst>
+              <a:ext uri="{FF2B5EF4-FFF2-40B4-BE49-F238E27FC236}">
+                <a16:creationId xmlns:a16="http://schemas.microsoft.com/office/drawing/2014/main" id="{6D0FD30A-FC84-461C-9FD0-158E9E332428}"/>
+              </a:ext>
+            </a:extLst>
+          </p:cNvPr>
+          <p:cNvPicPr>
+            <a:picLocks noGrp="1" noChangeAspect="1"/>
+          </p:cNvPicPr>
+          <p:nvPr>
+            <p:ph idx="1"/>
+          </p:nvPr>
+        </p:nvPicPr>
+        <p:blipFill>
+          <a:blip r:embed="rId2"/>
+          <a:stretch>
+            <a:fillRect/>
+          </a:stretch>
+        </p:blipFill>
+        <p:spPr>
+          <a:xfrm>
+            <a:off x="2577332" y="3429000"/>
+            <a:ext cx="7037336" cy="1531938"/>
+          </a:xfrm>
+        </p:spPr>
+      </p:pic>
+    </p:spTree>
+    <p:extLst>
+      <p:ext uri="{BB962C8B-B14F-4D97-AF65-F5344CB8AC3E}">
+        <p14:creationId xmlns:p14="http://schemas.microsoft.com/office/powerpoint/2010/main" val="1389860237"/>
+      </p:ext>
+    </p:extLst>
+  </p:cSld>
+  <p:clrMapOvr>
+    <a:masterClrMapping/>
+  </p:clrMapOvr>
+</p:sld>
+</file>
+
+<file path=ppt/slides/slide11.xml><?xml version="1.0" encoding="utf-8"?>
+<p:sld xmlns:a="http://schemas.openxmlformats.org/drawingml/2006/main" xmlns:r="http://schemas.openxmlformats.org/officeDocument/2006/relationships" xmlns:p="http://schemas.openxmlformats.org/presentationml/2006/main">
+  <p:cSld>
+    <p:spTree>
+      <p:nvGrpSpPr>
+        <p:cNvPr id="1" name=""/>
+        <p:cNvGrpSpPr/>
+        <p:nvPr/>
+      </p:nvGrpSpPr>
+      <p:grpSpPr>
+        <a:xfrm>
+          <a:off x="0" y="0"/>
+          <a:ext cx="0" cy="0"/>
+          <a:chOff x="0" y="0"/>
+          <a:chExt cx="0" cy="0"/>
+        </a:xfrm>
+      </p:grpSpPr>
+      <p:sp>
+        <p:nvSpPr>
+          <p:cNvPr id="2" name="Заголовок 1">
+            <a:extLst>
+              <a:ext uri="{FF2B5EF4-FFF2-40B4-BE49-F238E27FC236}">
+                <a16:creationId xmlns:a16="http://schemas.microsoft.com/office/drawing/2014/main" id="{A0EA0CDE-E3F6-4FA0-8982-E9355778B08D}"/>
+              </a:ext>
+            </a:extLst>
+          </p:cNvPr>
+          <p:cNvSpPr>
+            <a:spLocks noGrp="1"/>
+          </p:cNvSpPr>
+          <p:nvPr>
+            <p:ph type="title"/>
+          </p:nvPr>
+        </p:nvSpPr>
+        <p:spPr/>
+        <p:txBody>
+          <a:bodyPr/>
+          <a:lstStyle/>
+          <a:p>
+            <a:endParaRPr lang="ru-RU"/>
+          </a:p>
+        </p:txBody>
+      </p:sp>
+      <p:pic>
+        <p:nvPicPr>
+          <p:cNvPr id="5" name="Объект 4">
+            <a:extLst>
+              <a:ext uri="{FF2B5EF4-FFF2-40B4-BE49-F238E27FC236}">
+                <a16:creationId xmlns:a16="http://schemas.microsoft.com/office/drawing/2014/main" id="{73AA1B0F-CC33-4527-9F9A-C430FE7B5E81}"/>
+              </a:ext>
+            </a:extLst>
+          </p:cNvPr>
+          <p:cNvPicPr>
+            <a:picLocks noGrp="1" noChangeAspect="1"/>
+          </p:cNvPicPr>
+          <p:nvPr>
+            <p:ph idx="1"/>
+          </p:nvPr>
+        </p:nvPicPr>
+        <p:blipFill>
+          <a:blip r:embed="rId2"/>
+          <a:stretch>
+            <a:fillRect/>
+          </a:stretch>
+        </p:blipFill>
+        <p:spPr>
+          <a:xfrm>
+            <a:off x="244372" y="3767960"/>
+            <a:ext cx="11703256" cy="854018"/>
+          </a:xfrm>
+        </p:spPr>
+      </p:pic>
+    </p:spTree>
+    <p:extLst>
+      <p:ext uri="{BB962C8B-B14F-4D97-AF65-F5344CB8AC3E}">
+        <p14:creationId xmlns:p14="http://schemas.microsoft.com/office/powerpoint/2010/main" val="50514457"/>
+      </p:ext>
+    </p:extLst>
+  </p:cSld>
+  <p:clrMapOvr>
+    <a:masterClrMapping/>
+  </p:clrMapOvr>
+</p:sld>
+</file>
+
+<file path=ppt/slides/slide12.xml><?xml version="1.0" encoding="utf-8"?>
+<p:sld xmlns:a="http://schemas.openxmlformats.org/drawingml/2006/main" xmlns:r="http://schemas.openxmlformats.org/officeDocument/2006/relationships" xmlns:p="http://schemas.openxmlformats.org/presentationml/2006/main">
+  <p:cSld>
+    <p:spTree>
+      <p:nvGrpSpPr>
+        <p:cNvPr id="1" name=""/>
+        <p:cNvGrpSpPr/>
+        <p:nvPr/>
+      </p:nvGrpSpPr>
+      <p:grpSpPr>
+        <a:xfrm>
+          <a:off x="0" y="0"/>
+          <a:ext cx="0" cy="0"/>
+          <a:chOff x="0" y="0"/>
+          <a:chExt cx="0" cy="0"/>
+        </a:xfrm>
+      </p:grpSpPr>
+      <p:sp>
+        <p:nvSpPr>
+          <p:cNvPr id="2" name="Заголовок 1">
+            <a:extLst>
+              <a:ext uri="{FF2B5EF4-FFF2-40B4-BE49-F238E27FC236}">
+                <a16:creationId xmlns:a16="http://schemas.microsoft.com/office/drawing/2014/main" id="{22100702-C58F-48A0-A742-BF0C328A6A27}"/>
+              </a:ext>
+            </a:extLst>
+          </p:cNvPr>
+          <p:cNvSpPr>
+            <a:spLocks noGrp="1"/>
+          </p:cNvSpPr>
+          <p:nvPr>
+            <p:ph type="title"/>
+          </p:nvPr>
+        </p:nvSpPr>
+        <p:spPr/>
+        <p:txBody>
+          <a:bodyPr/>
+          <a:lstStyle/>
+          <a:p>
+            <a:endParaRPr lang="ru-RU"/>
+          </a:p>
+        </p:txBody>
+      </p:sp>
+      <p:pic>
+        <p:nvPicPr>
+          <p:cNvPr id="5" name="Объект 4">
+            <a:extLst>
+              <a:ext uri="{FF2B5EF4-FFF2-40B4-BE49-F238E27FC236}">
+                <a16:creationId xmlns:a16="http://schemas.microsoft.com/office/drawing/2014/main" id="{FF48E99F-E717-43F7-BC66-8A910EC3F3F1}"/>
+              </a:ext>
+            </a:extLst>
+          </p:cNvPr>
+          <p:cNvPicPr>
+            <a:picLocks noGrp="1" noChangeAspect="1"/>
+          </p:cNvPicPr>
+          <p:nvPr>
+            <p:ph idx="1"/>
+          </p:nvPr>
+        </p:nvPicPr>
+        <p:blipFill>
+          <a:blip r:embed="rId2"/>
+          <a:stretch>
+            <a:fillRect/>
+          </a:stretch>
+        </p:blipFill>
+        <p:spPr>
+          <a:xfrm>
+            <a:off x="2594185" y="3783725"/>
+            <a:ext cx="7003630" cy="822488"/>
+          </a:xfrm>
+        </p:spPr>
+      </p:pic>
+    </p:spTree>
+    <p:extLst>
+      <p:ext uri="{BB962C8B-B14F-4D97-AF65-F5344CB8AC3E}">
+        <p14:creationId xmlns:p14="http://schemas.microsoft.com/office/powerpoint/2010/main" val="1204343577"/>
+      </p:ext>
+    </p:extLst>
+  </p:cSld>
+  <p:clrMapOvr>
+    <a:masterClrMapping/>
+  </p:clrMapOvr>
+</p:sld>
+</file>
+
+<file path=ppt/slides/slide13.xml><?xml version="1.0" encoding="utf-8"?>
+<p:sld xmlns:a="http://schemas.openxmlformats.org/drawingml/2006/main" xmlns:r="http://schemas.openxmlformats.org/officeDocument/2006/relationships" xmlns:p="http://schemas.openxmlformats.org/presentationml/2006/main">
+  <p:cSld>
+    <p:spTree>
+      <p:nvGrpSpPr>
+        <p:cNvPr id="1" name=""/>
+        <p:cNvGrpSpPr/>
+        <p:nvPr/>
+      </p:nvGrpSpPr>
+      <p:grpSpPr>
+        <a:xfrm>
+          <a:off x="0" y="0"/>
+          <a:ext cx="0" cy="0"/>
+          <a:chOff x="0" y="0"/>
+          <a:chExt cx="0" cy="0"/>
+        </a:xfrm>
+      </p:grpSpPr>
+      <p:sp>
+        <p:nvSpPr>
+          <p:cNvPr id="2" name="Заголовок 1">
+            <a:extLst>
+              <a:ext uri="{FF2B5EF4-FFF2-40B4-BE49-F238E27FC236}">
+                <a16:creationId xmlns:a16="http://schemas.microsoft.com/office/drawing/2014/main" id="{CACB669A-FB71-45DE-9441-86E02906EABE}"/>
+              </a:ext>
+            </a:extLst>
+          </p:cNvPr>
+          <p:cNvSpPr>
+            <a:spLocks noGrp="1"/>
+          </p:cNvSpPr>
+          <p:nvPr>
+            <p:ph type="title"/>
+          </p:nvPr>
+        </p:nvSpPr>
+        <p:spPr/>
+        <p:txBody>
+          <a:bodyPr/>
+          <a:lstStyle/>
+          <a:p>
+            <a:endParaRPr lang="ru-RU"/>
+          </a:p>
+        </p:txBody>
+      </p:sp>
+      <p:pic>
+        <p:nvPicPr>
+          <p:cNvPr id="5" name="Объект 4">
+            <a:extLst>
+              <a:ext uri="{FF2B5EF4-FFF2-40B4-BE49-F238E27FC236}">
+                <a16:creationId xmlns:a16="http://schemas.microsoft.com/office/drawing/2014/main" id="{D6A1F754-9D1E-4956-85AD-1009A1A7F853}"/>
+              </a:ext>
+            </a:extLst>
+          </p:cNvPr>
+          <p:cNvPicPr>
+            <a:picLocks noGrp="1" noChangeAspect="1"/>
+          </p:cNvPicPr>
+          <p:nvPr>
+            <p:ph idx="1"/>
+          </p:nvPr>
+        </p:nvPicPr>
+        <p:blipFill>
+          <a:blip r:embed="rId2"/>
+          <a:stretch>
+            <a:fillRect/>
+          </a:stretch>
+        </p:blipFill>
+        <p:spPr>
+          <a:xfrm>
+            <a:off x="1485016" y="3752194"/>
+            <a:ext cx="9221968" cy="885550"/>
+          </a:xfrm>
+        </p:spPr>
+      </p:pic>
+    </p:spTree>
+    <p:extLst>
+      <p:ext uri="{BB962C8B-B14F-4D97-AF65-F5344CB8AC3E}">
+        <p14:creationId xmlns:p14="http://schemas.microsoft.com/office/powerpoint/2010/main" val="2245719615"/>
+      </p:ext>
+    </p:extLst>
+  </p:cSld>
+  <p:clrMapOvr>
+    <a:masterClrMapping/>
+  </p:clrMapOvr>
+</p:sld>
+</file>
+
+<file path=ppt/slides/slide14.xml><?xml version="1.0" encoding="utf-8"?>
+<p:sld xmlns:a="http://schemas.openxmlformats.org/drawingml/2006/main" xmlns:r="http://schemas.openxmlformats.org/officeDocument/2006/relationships" xmlns:p="http://schemas.openxmlformats.org/presentationml/2006/main">
+  <p:cSld>
+    <p:spTree>
+      <p:nvGrpSpPr>
+        <p:cNvPr id="1" name=""/>
+        <p:cNvGrpSpPr/>
+        <p:nvPr/>
+      </p:nvGrpSpPr>
+      <p:grpSpPr>
+        <a:xfrm>
+          <a:off x="0" y="0"/>
+          <a:ext cx="0" cy="0"/>
+          <a:chOff x="0" y="0"/>
+          <a:chExt cx="0" cy="0"/>
+        </a:xfrm>
+      </p:grpSpPr>
+      <p:sp>
+        <p:nvSpPr>
+          <p:cNvPr id="2" name="Заголовок 1">
+            <a:extLst>
+              <a:ext uri="{FF2B5EF4-FFF2-40B4-BE49-F238E27FC236}">
+                <a16:creationId xmlns:a16="http://schemas.microsoft.com/office/drawing/2014/main" id="{55926292-48FA-4FAE-993B-570BA9DF6E64}"/>
+              </a:ext>
+            </a:extLst>
+          </p:cNvPr>
+          <p:cNvSpPr>
+            <a:spLocks noGrp="1"/>
+          </p:cNvSpPr>
+          <p:nvPr>
+            <p:ph type="title"/>
+          </p:nvPr>
+        </p:nvSpPr>
+        <p:spPr/>
+        <p:txBody>
+          <a:bodyPr/>
+          <a:lstStyle/>
+          <a:p>
+            <a:endParaRPr lang="ru-RU"/>
+          </a:p>
+        </p:txBody>
+      </p:sp>
+      <p:pic>
+        <p:nvPicPr>
+          <p:cNvPr id="5" name="Объект 4">
+            <a:extLst>
+              <a:ext uri="{FF2B5EF4-FFF2-40B4-BE49-F238E27FC236}">
+                <a16:creationId xmlns:a16="http://schemas.microsoft.com/office/drawing/2014/main" id="{ADEA2389-F79D-4C22-AF69-7F26B7F5B2A6}"/>
+              </a:ext>
+            </a:extLst>
+          </p:cNvPr>
+          <p:cNvPicPr>
+            <a:picLocks noGrp="1" noChangeAspect="1"/>
+          </p:cNvPicPr>
+          <p:nvPr>
+            <p:ph idx="1"/>
+          </p:nvPr>
+        </p:nvPicPr>
+        <p:blipFill>
+          <a:blip r:embed="rId2"/>
+          <a:stretch>
+            <a:fillRect/>
+          </a:stretch>
+        </p:blipFill>
+        <p:spPr>
+          <a:xfrm>
+            <a:off x="2962194" y="3578773"/>
+            <a:ext cx="6267612" cy="1232392"/>
+          </a:xfrm>
+        </p:spPr>
+      </p:pic>
+    </p:spTree>
+    <p:extLst>
+      <p:ext uri="{BB962C8B-B14F-4D97-AF65-F5344CB8AC3E}">
+        <p14:creationId xmlns:p14="http://schemas.microsoft.com/office/powerpoint/2010/main" val="2906656424"/>
+      </p:ext>
+    </p:extLst>
+  </p:cSld>
+  <p:clrMapOvr>
+    <a:masterClrMapping/>
+  </p:clrMapOvr>
+</p:sld>
+</file>
+
+<file path=ppt/slides/slide15.xml><?xml version="1.0" encoding="utf-8"?>
+<p:sld xmlns:a="http://schemas.openxmlformats.org/drawingml/2006/main" xmlns:r="http://schemas.openxmlformats.org/officeDocument/2006/relationships" xmlns:p="http://schemas.openxmlformats.org/presentationml/2006/main">
+  <p:cSld>
+    <p:spTree>
+      <p:nvGrpSpPr>
+        <p:cNvPr id="1" name=""/>
+        <p:cNvGrpSpPr/>
+        <p:nvPr/>
+      </p:nvGrpSpPr>
+      <p:grpSpPr>
+        <a:xfrm>
+          <a:off x="0" y="0"/>
+          <a:ext cx="0" cy="0"/>
+          <a:chOff x="0" y="0"/>
+          <a:chExt cx="0" cy="0"/>
+        </a:xfrm>
+      </p:grpSpPr>
+      <p:sp>
+        <p:nvSpPr>
+          <p:cNvPr id="2" name="Заголовок 1">
+            <a:extLst>
+              <a:ext uri="{FF2B5EF4-FFF2-40B4-BE49-F238E27FC236}">
+                <a16:creationId xmlns:a16="http://schemas.microsoft.com/office/drawing/2014/main" id="{B65AF05D-82C6-4661-9151-E8C08055DE1E}"/>
+              </a:ext>
+            </a:extLst>
+          </p:cNvPr>
+          <p:cNvSpPr>
+            <a:spLocks noGrp="1"/>
+          </p:cNvSpPr>
+          <p:nvPr>
+            <p:ph type="title"/>
+          </p:nvPr>
+        </p:nvSpPr>
+        <p:spPr/>
+        <p:txBody>
+          <a:bodyPr/>
+          <a:lstStyle/>
+          <a:p>
+            <a:endParaRPr lang="ru-RU" dirty="0"/>
+          </a:p>
+        </p:txBody>
+      </p:sp>
+      <p:pic>
+        <p:nvPicPr>
+          <p:cNvPr id="5" name="Объект 4">
+            <a:extLst>
+              <a:ext uri="{FF2B5EF4-FFF2-40B4-BE49-F238E27FC236}">
+                <a16:creationId xmlns:a16="http://schemas.microsoft.com/office/drawing/2014/main" id="{34092ACA-FDD3-42AA-9868-9377C4A3B88C}"/>
+              </a:ext>
+            </a:extLst>
+          </p:cNvPr>
+          <p:cNvPicPr>
+            <a:picLocks noGrp="1" noChangeAspect="1"/>
+          </p:cNvPicPr>
+          <p:nvPr>
+            <p:ph idx="1"/>
+          </p:nvPr>
+        </p:nvPicPr>
+        <p:blipFill>
+          <a:blip r:embed="rId2"/>
+          <a:stretch>
+            <a:fillRect/>
+          </a:stretch>
+        </p:blipFill>
+        <p:spPr>
+          <a:xfrm>
+            <a:off x="2209632" y="3547241"/>
+            <a:ext cx="7772736" cy="1295456"/>
+          </a:xfrm>
+        </p:spPr>
+      </p:pic>
+      <p:pic>
+        <p:nvPicPr>
+          <p:cNvPr id="5124" name="Picture 4" descr="Picture background">
+            <a:extLst>
+              <a:ext uri="{FF2B5EF4-FFF2-40B4-BE49-F238E27FC236}">
+                <a16:creationId xmlns:a16="http://schemas.microsoft.com/office/drawing/2014/main" id="{CDB51E92-A345-4C21-941B-536F98D2EAAB}"/>
+              </a:ext>
+            </a:extLst>
+          </p:cNvPr>
+          <p:cNvPicPr>
+            <a:picLocks noChangeAspect="1" noChangeArrowheads="1"/>
+          </p:cNvPicPr>
+          <p:nvPr/>
+        </p:nvPicPr>
+        <p:blipFill>
+          <a:blip r:embed="rId3">
+            <a:extLst>
+              <a:ext uri="{28A0092B-C50C-407E-A947-70E740481C1C}">
+                <a14:useLocalDpi xmlns:a14="http://schemas.microsoft.com/office/drawing/2010/main" val="0"/>
+              </a:ext>
+            </a:extLst>
+          </a:blip>
+          <a:srcRect/>
+          <a:stretch>
+            <a:fillRect/>
+          </a:stretch>
+        </p:blipFill>
+        <p:spPr bwMode="auto">
+          <a:xfrm>
+            <a:off x="7879092" y="2880153"/>
+            <a:ext cx="3550908" cy="2327404"/>
+          </a:xfrm>
+          <a:prstGeom prst="rect">
+            <a:avLst/>
+          </a:prstGeom>
+          <a:noFill/>
+          <a:extLst>
+            <a:ext uri="{909E8E84-426E-40DD-AFC4-6F175D3DCCD1}">
+              <a14:hiddenFill xmlns:a14="http://schemas.microsoft.com/office/drawing/2010/main">
+                <a:solidFill>
+                  <a:srgbClr val="FFFFFF"/>
+                </a:solidFill>
+              </a14:hiddenFill>
+            </a:ext>
+          </a:extLst>
+        </p:spPr>
+      </p:pic>
+    </p:spTree>
+    <p:extLst>
+      <p:ext uri="{BB962C8B-B14F-4D97-AF65-F5344CB8AC3E}">
+        <p14:creationId xmlns:p14="http://schemas.microsoft.com/office/powerpoint/2010/main" val="2399310223"/>
+      </p:ext>
+    </p:extLst>
+  </p:cSld>
+  <p:clrMapOvr>
+    <a:masterClrMapping/>
+  </p:clrMapOvr>
+</p:sld>
+</file>
+
+<file path=ppt/slides/slide16.xml><?xml version="1.0" encoding="utf-8"?>
+<p:sld xmlns:a="http://schemas.openxmlformats.org/drawingml/2006/main" xmlns:r="http://schemas.openxmlformats.org/officeDocument/2006/relationships" xmlns:p="http://schemas.openxmlformats.org/presentationml/2006/main">
+  <p:cSld>
+    <p:spTree>
+      <p:nvGrpSpPr>
+        <p:cNvPr id="1" name=""/>
+        <p:cNvGrpSpPr/>
+        <p:nvPr/>
+      </p:nvGrpSpPr>
+      <p:grpSpPr>
+        <a:xfrm>
+          <a:off x="0" y="0"/>
+          <a:ext cx="0" cy="0"/>
+          <a:chOff x="0" y="0"/>
+          <a:chExt cx="0" cy="0"/>
+        </a:xfrm>
+      </p:grpSpPr>
+      <p:sp>
+        <p:nvSpPr>
+          <p:cNvPr id="2" name="Заголовок 1">
+            <a:extLst>
+              <a:ext uri="{FF2B5EF4-FFF2-40B4-BE49-F238E27FC236}">
+                <a16:creationId xmlns:a16="http://schemas.microsoft.com/office/drawing/2014/main" id="{38D52459-D75E-47AA-B794-5AC0D01285AD}"/>
+              </a:ext>
+            </a:extLst>
+          </p:cNvPr>
+          <p:cNvSpPr>
+            <a:spLocks noGrp="1"/>
+          </p:cNvSpPr>
+          <p:nvPr>
+            <p:ph type="title"/>
+          </p:nvPr>
+        </p:nvSpPr>
+        <p:spPr/>
+        <p:txBody>
+          <a:bodyPr/>
+          <a:lstStyle/>
+          <a:p>
+            <a:r>
+              <a:rPr lang="ru-RU" dirty="0"/>
+              <a:t>Сложность</a:t>
+            </a:r>
+            <a:r>
+              <a:rPr lang="ru-RU" b="1" i="0" u="none" strike="noStrike" dirty="0">
+                <a:solidFill>
+                  <a:srgbClr val="8BB4DD"/>
+                </a:solidFill>
+                <a:effectLst/>
+                <a:latin typeface="YS Text"/>
+                <a:hlinkClick r:id="rId2"/>
+              </a:rPr>
+              <a:t> 💅🏻</a:t>
+            </a:r>
+            <a:endParaRPr lang="ru-RU" dirty="0"/>
+          </a:p>
+        </p:txBody>
+      </p:sp>
+      <p:pic>
+        <p:nvPicPr>
+          <p:cNvPr id="5" name="Объект 4">
+            <a:extLst>
+              <a:ext uri="{FF2B5EF4-FFF2-40B4-BE49-F238E27FC236}">
+                <a16:creationId xmlns:a16="http://schemas.microsoft.com/office/drawing/2014/main" id="{DDEACDB1-84D2-4339-A755-765A3EB5A237}"/>
+              </a:ext>
+            </a:extLst>
+          </p:cNvPr>
+          <p:cNvPicPr>
+            <a:picLocks noGrp="1" noChangeAspect="1"/>
+          </p:cNvPicPr>
+          <p:nvPr>
+            <p:ph idx="1"/>
+          </p:nvPr>
+        </p:nvPicPr>
+        <p:blipFill>
+          <a:blip r:embed="rId3"/>
+          <a:stretch>
+            <a:fillRect/>
+          </a:stretch>
+        </p:blipFill>
+        <p:spPr>
+          <a:xfrm>
+            <a:off x="1338262" y="3209131"/>
+            <a:ext cx="9515475" cy="1971675"/>
+          </a:xfrm>
+        </p:spPr>
+      </p:pic>
+    </p:spTree>
+    <p:extLst>
+      <p:ext uri="{BB962C8B-B14F-4D97-AF65-F5344CB8AC3E}">
+        <p14:creationId xmlns:p14="http://schemas.microsoft.com/office/powerpoint/2010/main" val="2991206757"/>
+      </p:ext>
+    </p:extLst>
+  </p:cSld>
+  <p:clrMapOvr>
+    <a:masterClrMapping/>
+  </p:clrMapOvr>
+</p:sld>
+</file>
+
+<file path=ppt/slides/slide17.xml><?xml version="1.0" encoding="utf-8"?>
+<p:sld xmlns:a="http://schemas.openxmlformats.org/drawingml/2006/main" xmlns:r="http://schemas.openxmlformats.org/officeDocument/2006/relationships" xmlns:p="http://schemas.openxmlformats.org/presentationml/2006/main">
+  <p:cSld>
+    <p:spTree>
+      <p:nvGrpSpPr>
+        <p:cNvPr id="1" name=""/>
+        <p:cNvGrpSpPr/>
+        <p:nvPr/>
+      </p:nvGrpSpPr>
+      <p:grpSpPr>
+        <a:xfrm>
+          <a:off x="0" y="0"/>
+          <a:ext cx="0" cy="0"/>
+          <a:chOff x="0" y="0"/>
+          <a:chExt cx="0" cy="0"/>
+        </a:xfrm>
+      </p:grpSpPr>
+      <p:sp>
+        <p:nvSpPr>
+          <p:cNvPr id="2" name="Заголовок 1">
+            <a:extLst>
+              <a:ext uri="{FF2B5EF4-FFF2-40B4-BE49-F238E27FC236}">
+                <a16:creationId xmlns:a16="http://schemas.microsoft.com/office/drawing/2014/main" id="{2A1AE8F7-D91E-48BB-A053-5488D98C3375}"/>
+              </a:ext>
+            </a:extLst>
+          </p:cNvPr>
+          <p:cNvSpPr>
+            <a:spLocks noGrp="1"/>
+          </p:cNvSpPr>
+          <p:nvPr>
+            <p:ph type="title"/>
+          </p:nvPr>
+        </p:nvSpPr>
+        <p:spPr/>
+        <p:txBody>
+          <a:bodyPr/>
+          <a:lstStyle/>
+          <a:p>
+            <a:endParaRPr lang="ru-RU" dirty="0"/>
+          </a:p>
+        </p:txBody>
+      </p:sp>
+      <p:pic>
+        <p:nvPicPr>
+          <p:cNvPr id="5" name="Объект 4">
+            <a:extLst>
+              <a:ext uri="{FF2B5EF4-FFF2-40B4-BE49-F238E27FC236}">
+                <a16:creationId xmlns:a16="http://schemas.microsoft.com/office/drawing/2014/main" id="{FE0C30DB-0E78-4F74-941F-E371697207DA}"/>
+              </a:ext>
+            </a:extLst>
+          </p:cNvPr>
+          <p:cNvPicPr>
+            <a:picLocks noGrp="1" noChangeAspect="1"/>
+          </p:cNvPicPr>
+          <p:nvPr>
+            <p:ph idx="1"/>
+          </p:nvPr>
+        </p:nvPicPr>
+        <p:blipFill>
+          <a:blip r:embed="rId2"/>
+          <a:stretch>
+            <a:fillRect/>
+          </a:stretch>
+        </p:blipFill>
+        <p:spPr>
+          <a:xfrm>
+            <a:off x="1229710" y="2929243"/>
+            <a:ext cx="9732580" cy="2531452"/>
+          </a:xfrm>
+        </p:spPr>
+      </p:pic>
+    </p:spTree>
+    <p:extLst>
+      <p:ext uri="{BB962C8B-B14F-4D97-AF65-F5344CB8AC3E}">
+        <p14:creationId xmlns:p14="http://schemas.microsoft.com/office/powerpoint/2010/main" val="4166424136"/>
+      </p:ext>
+    </p:extLst>
+  </p:cSld>
+  <p:clrMapOvr>
+    <a:masterClrMapping/>
+  </p:clrMapOvr>
+</p:sld>
+</file>
+
+<file path=ppt/slides/slide18.xml><?xml version="1.0" encoding="utf-8"?>
+<p:sld xmlns:a="http://schemas.openxmlformats.org/drawingml/2006/main" xmlns:r="http://schemas.openxmlformats.org/officeDocument/2006/relationships" xmlns:p="http://schemas.openxmlformats.org/presentationml/2006/main">
+  <p:cSld>
+    <p:spTree>
+      <p:nvGrpSpPr>
+        <p:cNvPr id="1" name=""/>
+        <p:cNvGrpSpPr/>
+        <p:nvPr/>
+      </p:nvGrpSpPr>
+      <p:grpSpPr>
+        <a:xfrm>
+          <a:off x="0" y="0"/>
+          <a:ext cx="0" cy="0"/>
+          <a:chOff x="0" y="0"/>
+          <a:chExt cx="0" cy="0"/>
+        </a:xfrm>
+      </p:grpSpPr>
+      <p:sp>
+        <p:nvSpPr>
+          <p:cNvPr id="2" name="Заголовок 1">
+            <a:extLst>
+              <a:ext uri="{FF2B5EF4-FFF2-40B4-BE49-F238E27FC236}">
+                <a16:creationId xmlns:a16="http://schemas.microsoft.com/office/drawing/2014/main" id="{3AD82182-40DA-4B0A-8624-CE80ED2B9582}"/>
+              </a:ext>
+            </a:extLst>
+          </p:cNvPr>
+          <p:cNvSpPr>
+            <a:spLocks noGrp="1"/>
+          </p:cNvSpPr>
+          <p:nvPr>
+            <p:ph type="title"/>
+          </p:nvPr>
+        </p:nvSpPr>
+        <p:spPr/>
+        <p:txBody>
+          <a:bodyPr/>
+          <a:lstStyle/>
+          <a:p>
+            <a:r>
+              <a:rPr lang="ru-RU" dirty="0"/>
+              <a:t>Когда выбирать </a:t>
+            </a:r>
+            <a:r>
+              <a:rPr lang="ru-RU" dirty="0" err="1"/>
+              <a:t>Splay</a:t>
+            </a:r>
+            <a:r>
+              <a:rPr lang="ru-RU" dirty="0"/>
+              <a:t> </a:t>
+            </a:r>
+            <a:r>
+              <a:rPr lang="ru-RU" dirty="0" err="1"/>
+              <a:t>Tree</a:t>
+            </a:r>
+            <a:r>
+              <a:rPr lang="ru-RU" dirty="0"/>
+              <a:t>?</a:t>
+            </a:r>
+            <a:r>
+              <a:rPr lang="ru-RU" b="1" i="0" u="none" strike="noStrike" dirty="0">
+                <a:solidFill>
+                  <a:srgbClr val="8BB4DD"/>
+                </a:solidFill>
+                <a:effectLst/>
+                <a:latin typeface="YS Text"/>
+                <a:hlinkClick r:id="rId2"/>
+              </a:rPr>
+              <a:t> 💅🏻</a:t>
+            </a:r>
+            <a:br>
+              <a:rPr lang="ru-RU" dirty="0"/>
+            </a:br>
+            <a:endParaRPr lang="ru-RU" dirty="0"/>
+          </a:p>
+        </p:txBody>
+      </p:sp>
+      <p:sp>
+        <p:nvSpPr>
+          <p:cNvPr id="3" name="Объект 2">
+            <a:extLst>
+              <a:ext uri="{FF2B5EF4-FFF2-40B4-BE49-F238E27FC236}">
+                <a16:creationId xmlns:a16="http://schemas.microsoft.com/office/drawing/2014/main" id="{5BDD976F-7C9A-4A1F-A45C-0E50135563C2}"/>
+              </a:ext>
+            </a:extLst>
+          </p:cNvPr>
+          <p:cNvSpPr>
+            <a:spLocks noGrp="1"/>
+          </p:cNvSpPr>
+          <p:nvPr>
+            <p:ph idx="1"/>
+          </p:nvPr>
+        </p:nvSpPr>
+        <p:spPr/>
+        <p:txBody>
+          <a:bodyPr>
+            <a:normAutofit fontScale="85000" lnSpcReduction="20000"/>
+          </a:bodyPr>
+          <a:lstStyle/>
+          <a:p>
+            <a:pPr marL="0" indent="0">
+              <a:buNone/>
+            </a:pPr>
+            <a:r>
+              <a:rPr lang="ru-RU" dirty="0"/>
+              <a:t>Выбирайте </a:t>
+            </a:r>
+            <a:r>
+              <a:rPr lang="ru-RU" dirty="0" err="1"/>
+              <a:t>Splay</a:t>
+            </a:r>
+            <a:r>
+              <a:rPr lang="ru-RU" dirty="0"/>
+              <a:t> </a:t>
+            </a:r>
+            <a:r>
+              <a:rPr lang="ru-RU" dirty="0" err="1"/>
+              <a:t>Tree</a:t>
+            </a:r>
+            <a:r>
+              <a:rPr lang="ru-RU" dirty="0"/>
+              <a:t>, если:</a:t>
+            </a:r>
+          </a:p>
+          <a:p>
+            <a:r>
+              <a:rPr lang="ru-RU" dirty="0"/>
+              <a:t>🔸 Доступ к данным неравномерный (некоторые элементы запрашиваются в 10–100 раз чаще других)</a:t>
+            </a:r>
+          </a:p>
+          <a:p>
+            <a:r>
+              <a:rPr lang="ru-RU" dirty="0"/>
+              <a:t>🔸 Критична экономия памяти (нет места для флагов баланса)</a:t>
+            </a:r>
+          </a:p>
+          <a:p>
+            <a:r>
+              <a:rPr lang="ru-RU" dirty="0"/>
+              <a:t>🔸 Не требуется гарантированное время каждой отдельной операции</a:t>
+            </a:r>
+          </a:p>
+          <a:p>
+            <a:r>
+              <a:rPr lang="ru-RU" dirty="0"/>
+              <a:t>🔸 Приложение однопоточное (</a:t>
+            </a:r>
+            <a:r>
+              <a:rPr lang="ru-RU" dirty="0" err="1"/>
+              <a:t>Splay</a:t>
+            </a:r>
+            <a:r>
+              <a:rPr lang="ru-RU" dirty="0"/>
+              <a:t> сложно адаптировать под многопоточность)</a:t>
+            </a:r>
+          </a:p>
+          <a:p>
+            <a:r>
+              <a:rPr lang="ru-RU" dirty="0"/>
+              <a:t>🔸 Важна простота реализации (код короче, чем у красно-чёрного дерева)</a:t>
+            </a:r>
+          </a:p>
+        </p:txBody>
+      </p:sp>
+    </p:spTree>
+    <p:extLst>
+      <p:ext uri="{BB962C8B-B14F-4D97-AF65-F5344CB8AC3E}">
+        <p14:creationId xmlns:p14="http://schemas.microsoft.com/office/powerpoint/2010/main" val="2568463272"/>
+      </p:ext>
+    </p:extLst>
+  </p:cSld>
+  <p:clrMapOvr>
+    <a:masterClrMapping/>
+  </p:clrMapOvr>
+</p:sld>
+</file>
+
+<file path=ppt/slides/slide19.xml><?xml version="1.0" encoding="utf-8"?>
+<p:sld xmlns:a="http://schemas.openxmlformats.org/drawingml/2006/main" xmlns:r="http://schemas.openxmlformats.org/officeDocument/2006/relationships" xmlns:p="http://schemas.openxmlformats.org/presentationml/2006/main">
+  <p:cSld>
+    <p:spTree>
+      <p:nvGrpSpPr>
+        <p:cNvPr id="1" name=""/>
+        <p:cNvGrpSpPr/>
+        <p:nvPr/>
+      </p:nvGrpSpPr>
+      <p:grpSpPr>
+        <a:xfrm>
+          <a:off x="0" y="0"/>
+          <a:ext cx="0" cy="0"/>
+          <a:chOff x="0" y="0"/>
+          <a:chExt cx="0" cy="0"/>
+        </a:xfrm>
+      </p:grpSpPr>
+      <p:sp>
+        <p:nvSpPr>
+          <p:cNvPr id="2" name="Заголовок 1">
+            <a:extLst>
+              <a:ext uri="{FF2B5EF4-FFF2-40B4-BE49-F238E27FC236}">
+                <a16:creationId xmlns:a16="http://schemas.microsoft.com/office/drawing/2014/main" id="{3AD82182-40DA-4B0A-8624-CE80ED2B9582}"/>
+              </a:ext>
+            </a:extLst>
+          </p:cNvPr>
+          <p:cNvSpPr>
+            <a:spLocks noGrp="1"/>
+          </p:cNvSpPr>
+          <p:nvPr>
+            <p:ph type="title"/>
+          </p:nvPr>
+        </p:nvSpPr>
+        <p:spPr/>
+        <p:txBody>
+          <a:bodyPr/>
+          <a:lstStyle/>
+          <a:p>
+            <a:r>
+              <a:rPr lang="ru-RU" dirty="0"/>
+              <a:t>Когда</a:t>
+            </a:r>
+            <a:r>
+              <a:rPr lang="en-US" dirty="0"/>
+              <a:t> </a:t>
+            </a:r>
+            <a:r>
+              <a:rPr lang="ru-RU" dirty="0"/>
+              <a:t>не выбирать </a:t>
+            </a:r>
+            <a:r>
+              <a:rPr lang="ru-RU" dirty="0" err="1"/>
+              <a:t>Splay</a:t>
+            </a:r>
+            <a:r>
+              <a:rPr lang="ru-RU" dirty="0"/>
+              <a:t> </a:t>
+            </a:r>
+            <a:r>
+              <a:rPr lang="ru-RU" dirty="0" err="1"/>
+              <a:t>Tree</a:t>
+            </a:r>
+            <a:r>
+              <a:rPr lang="ru-RU" dirty="0"/>
+              <a:t>?</a:t>
+            </a:r>
+            <a:r>
+              <a:rPr lang="ru-RU" b="1" i="0" u="none" strike="noStrike" dirty="0">
+                <a:solidFill>
+                  <a:srgbClr val="8BB4DD"/>
+                </a:solidFill>
+                <a:effectLst/>
+                <a:latin typeface="YS Text"/>
+                <a:hlinkClick r:id="rId2"/>
+              </a:rPr>
+              <a:t> 💅🏻</a:t>
+            </a:r>
+            <a:br>
+              <a:rPr lang="ru-RU" dirty="0"/>
+            </a:br>
+            <a:endParaRPr lang="ru-RU" dirty="0"/>
+          </a:p>
+        </p:txBody>
+      </p:sp>
+      <p:sp>
+        <p:nvSpPr>
+          <p:cNvPr id="3" name="Объект 2">
+            <a:extLst>
+              <a:ext uri="{FF2B5EF4-FFF2-40B4-BE49-F238E27FC236}">
+                <a16:creationId xmlns:a16="http://schemas.microsoft.com/office/drawing/2014/main" id="{5BDD976F-7C9A-4A1F-A45C-0E50135563C2}"/>
+              </a:ext>
+            </a:extLst>
+          </p:cNvPr>
+          <p:cNvSpPr>
+            <a:spLocks noGrp="1"/>
+          </p:cNvSpPr>
+          <p:nvPr>
+            <p:ph idx="1"/>
+          </p:nvPr>
+        </p:nvSpPr>
+        <p:spPr/>
+        <p:txBody>
+          <a:bodyPr>
+            <a:normAutofit fontScale="77500" lnSpcReduction="20000"/>
+          </a:bodyPr>
+          <a:lstStyle/>
+          <a:p>
+            <a:pPr marL="0" indent="0">
+              <a:buNone/>
+            </a:pPr>
+            <a:r>
+              <a:rPr lang="ru-RU" dirty="0"/>
+              <a:t>Не выбирайте </a:t>
+            </a:r>
+            <a:r>
+              <a:rPr lang="ru-RU" dirty="0" err="1"/>
+              <a:t>Splay</a:t>
+            </a:r>
+            <a:r>
+              <a:rPr lang="ru-RU" dirty="0"/>
+              <a:t> </a:t>
+            </a:r>
+            <a:r>
+              <a:rPr lang="ru-RU" dirty="0" err="1"/>
+              <a:t>Tree</a:t>
+            </a:r>
+            <a:r>
+              <a:rPr lang="ru-RU" dirty="0"/>
+              <a:t>, если:</a:t>
+            </a:r>
+          </a:p>
+          <a:p>
+            <a:pPr algn="l">
+              <a:buFont typeface="Arial" panose="020B0604020202020204" pitchFamily="34" charset="0"/>
+              <a:buChar char="•"/>
+            </a:pPr>
+            <a:r>
+              <a:rPr lang="ru-RU" b="0" i="0" dirty="0">
+                <a:solidFill>
+                  <a:srgbClr val="F7F8FC"/>
+                </a:solidFill>
+                <a:effectLst/>
+                <a:latin typeface="system-ui"/>
+              </a:rPr>
+              <a:t>🔹 Нужна </a:t>
+            </a:r>
+            <a:r>
+              <a:rPr lang="ru-RU" b="1" i="0" dirty="0">
+                <a:solidFill>
+                  <a:srgbClr val="F7F8FC"/>
+                </a:solidFill>
+                <a:effectLst/>
+                <a:latin typeface="system-ui"/>
+              </a:rPr>
+              <a:t>строгая гарантия</a:t>
+            </a:r>
+            <a:r>
+              <a:rPr lang="ru-RU" b="0" i="0" dirty="0">
+                <a:solidFill>
+                  <a:srgbClr val="F7F8FC"/>
+                </a:solidFill>
+                <a:effectLst/>
+                <a:latin typeface="system-ui"/>
+              </a:rPr>
+              <a:t> </a:t>
+            </a:r>
+            <a:r>
+              <a:rPr lang="ru-RU" b="0" i="0" dirty="0">
+                <a:solidFill>
+                  <a:srgbClr val="F7F8FC"/>
+                </a:solidFill>
+                <a:effectLst/>
+                <a:latin typeface="KaTeX_Main"/>
+              </a:rPr>
+              <a:t>O(</a:t>
+            </a:r>
+            <a:r>
+              <a:rPr lang="ru-RU" b="0" i="0" dirty="0" err="1">
+                <a:solidFill>
+                  <a:srgbClr val="F7F8FC"/>
+                </a:solidFill>
+                <a:effectLst/>
+                <a:latin typeface="KaTeX_Main"/>
+              </a:rPr>
+              <a:t>log⁡n</a:t>
+            </a:r>
+            <a:r>
+              <a:rPr lang="ru-RU" b="0" i="0" dirty="0">
+                <a:solidFill>
+                  <a:srgbClr val="F7F8FC"/>
+                </a:solidFill>
+                <a:effectLst/>
+                <a:latin typeface="KaTeX_Main"/>
+              </a:rPr>
+              <a:t>)</a:t>
+            </a:r>
+            <a:r>
+              <a:rPr lang="ru-RU" i="1" dirty="0">
+                <a:solidFill>
+                  <a:srgbClr val="F7F8FC"/>
+                </a:solidFill>
+                <a:latin typeface="KaTeX_Math"/>
+              </a:rPr>
+              <a:t> </a:t>
+            </a:r>
+            <a:r>
+              <a:rPr lang="ru-RU" b="0" i="0" dirty="0">
+                <a:solidFill>
+                  <a:srgbClr val="F7F8FC"/>
+                </a:solidFill>
+                <a:effectLst/>
+                <a:latin typeface="system-ui"/>
+              </a:rPr>
+              <a:t>на каждую операцию (выберите AVL или красно-чёрное дерево)</a:t>
+            </a:r>
+          </a:p>
+          <a:p>
+            <a:pPr algn="l">
+              <a:buFont typeface="Arial" panose="020B0604020202020204" pitchFamily="34" charset="0"/>
+              <a:buChar char="•"/>
+            </a:pPr>
+            <a:r>
+              <a:rPr lang="ru-RU" b="0" i="0" dirty="0">
+                <a:solidFill>
+                  <a:srgbClr val="F7F8FC"/>
+                </a:solidFill>
+                <a:effectLst/>
+                <a:latin typeface="system-ui"/>
+              </a:rPr>
+              <a:t>🔹 Система </a:t>
+            </a:r>
+            <a:r>
+              <a:rPr lang="ru-RU" b="1" i="0" dirty="0">
+                <a:solidFill>
+                  <a:srgbClr val="F7F8FC"/>
+                </a:solidFill>
+                <a:effectLst/>
+                <a:latin typeface="system-ui"/>
+              </a:rPr>
+              <a:t>реального времени</a:t>
+            </a:r>
+            <a:r>
+              <a:rPr lang="ru-RU" b="0" i="0" dirty="0">
+                <a:solidFill>
+                  <a:srgbClr val="F7F8FC"/>
+                </a:solidFill>
+                <a:effectLst/>
+                <a:latin typeface="system-ui"/>
+              </a:rPr>
+              <a:t> (</a:t>
+            </a:r>
+            <a:r>
+              <a:rPr lang="ru-RU" b="0" i="0" dirty="0" err="1">
+                <a:solidFill>
+                  <a:srgbClr val="F7F8FC"/>
+                </a:solidFill>
+                <a:effectLst/>
+                <a:latin typeface="system-ui"/>
+              </a:rPr>
+              <a:t>hard</a:t>
+            </a:r>
+            <a:r>
+              <a:rPr lang="ru-RU" b="0" i="0" dirty="0">
+                <a:solidFill>
+                  <a:srgbClr val="F7F8FC"/>
+                </a:solidFill>
+                <a:effectLst/>
+                <a:latin typeface="system-ui"/>
+              </a:rPr>
+              <a:t> </a:t>
+            </a:r>
+            <a:r>
+              <a:rPr lang="ru-RU" b="0" i="0" dirty="0" err="1">
+                <a:solidFill>
+                  <a:srgbClr val="F7F8FC"/>
+                </a:solidFill>
+                <a:effectLst/>
+                <a:latin typeface="system-ui"/>
+              </a:rPr>
+              <a:t>real-time</a:t>
+            </a:r>
+            <a:r>
+              <a:rPr lang="ru-RU" b="0" i="0" dirty="0">
+                <a:solidFill>
+                  <a:srgbClr val="F7F8FC"/>
+                </a:solidFill>
+                <a:effectLst/>
+                <a:latin typeface="system-ui"/>
+              </a:rPr>
+              <a:t>), где недопустимы «просадки» до </a:t>
+            </a:r>
+            <a:r>
+              <a:rPr lang="ru-RU" b="0" i="0" dirty="0">
+                <a:solidFill>
+                  <a:srgbClr val="F7F8FC"/>
+                </a:solidFill>
+                <a:effectLst/>
+                <a:latin typeface="KaTeX_Main"/>
+              </a:rPr>
+              <a:t>O(n)</a:t>
+            </a:r>
+            <a:r>
+              <a:rPr lang="ru-RU" b="0" i="1" dirty="0">
+                <a:solidFill>
+                  <a:srgbClr val="F7F8FC"/>
+                </a:solidFill>
+                <a:effectLst/>
+                <a:latin typeface="KaTeX_Math"/>
+              </a:rPr>
+              <a:t>O</a:t>
+            </a:r>
+            <a:r>
+              <a:rPr lang="ru-RU" b="0" i="0" dirty="0">
+                <a:solidFill>
+                  <a:srgbClr val="F7F8FC"/>
+                </a:solidFill>
+                <a:effectLst/>
+                <a:latin typeface="KaTeX_Main"/>
+              </a:rPr>
+              <a:t>(</a:t>
+            </a:r>
+            <a:r>
+              <a:rPr lang="ru-RU" b="0" i="1" dirty="0">
+                <a:solidFill>
+                  <a:srgbClr val="F7F8FC"/>
+                </a:solidFill>
+                <a:effectLst/>
+                <a:latin typeface="KaTeX_Math"/>
+              </a:rPr>
+              <a:t>n</a:t>
+            </a:r>
+            <a:r>
+              <a:rPr lang="ru-RU" b="0" i="0" dirty="0">
+                <a:solidFill>
+                  <a:srgbClr val="F7F8FC"/>
+                </a:solidFill>
+                <a:effectLst/>
+                <a:latin typeface="KaTeX_Main"/>
+              </a:rPr>
+              <a:t>)</a:t>
+            </a:r>
+            <a:endParaRPr lang="ru-RU" b="0" i="0" dirty="0">
+              <a:solidFill>
+                <a:srgbClr val="F7F8FC"/>
+              </a:solidFill>
+              <a:effectLst/>
+              <a:latin typeface="system-ui"/>
+            </a:endParaRPr>
+          </a:p>
+          <a:p>
+            <a:pPr algn="l">
+              <a:buFont typeface="Arial" panose="020B0604020202020204" pitchFamily="34" charset="0"/>
+              <a:buChar char="•"/>
+            </a:pPr>
+            <a:r>
+              <a:rPr lang="ru-RU" b="0" i="0" dirty="0">
+                <a:solidFill>
+                  <a:srgbClr val="F7F8FC"/>
+                </a:solidFill>
+                <a:effectLst/>
+                <a:latin typeface="system-ui"/>
+              </a:rPr>
+              <a:t>🔹 Требуется </a:t>
+            </a:r>
+            <a:r>
+              <a:rPr lang="ru-RU" b="1" i="0" dirty="0">
+                <a:solidFill>
+                  <a:srgbClr val="F7F8FC"/>
+                </a:solidFill>
+                <a:effectLst/>
+                <a:latin typeface="system-ui"/>
+              </a:rPr>
+              <a:t>многопоточный доступ</a:t>
+            </a:r>
+            <a:r>
+              <a:rPr lang="ru-RU" b="0" i="0" dirty="0">
+                <a:solidFill>
+                  <a:srgbClr val="F7F8FC"/>
+                </a:solidFill>
+                <a:effectLst/>
+                <a:latin typeface="system-ui"/>
+              </a:rPr>
+              <a:t> (частые ротации усложняют синхронизацию)</a:t>
+            </a:r>
+          </a:p>
+          <a:p>
+            <a:pPr algn="l">
+              <a:buFont typeface="Arial" panose="020B0604020202020204" pitchFamily="34" charset="0"/>
+              <a:buChar char="•"/>
+            </a:pPr>
+            <a:r>
+              <a:rPr lang="ru-RU" b="0" i="0" dirty="0">
+                <a:solidFill>
+                  <a:srgbClr val="F7F8FC"/>
+                </a:solidFill>
+                <a:effectLst/>
+                <a:latin typeface="system-ui"/>
+              </a:rPr>
+              <a:t>🔹 Структура должна быть </a:t>
+            </a:r>
+            <a:r>
+              <a:rPr lang="ru-RU" b="1" i="0" dirty="0">
+                <a:solidFill>
+                  <a:srgbClr val="F7F8FC"/>
+                </a:solidFill>
+                <a:effectLst/>
+                <a:latin typeface="system-ui"/>
+              </a:rPr>
+              <a:t>неизменяемой</a:t>
+            </a:r>
+            <a:r>
+              <a:rPr lang="ru-RU" b="0" i="0" dirty="0">
+                <a:solidFill>
+                  <a:srgbClr val="F7F8FC"/>
+                </a:solidFill>
+                <a:effectLst/>
+                <a:latin typeface="system-ui"/>
+              </a:rPr>
+              <a:t> (</a:t>
+            </a:r>
+            <a:r>
+              <a:rPr lang="ru-RU" b="0" i="0" dirty="0" err="1">
+                <a:solidFill>
+                  <a:srgbClr val="F7F8FC"/>
+                </a:solidFill>
+                <a:effectLst/>
+                <a:latin typeface="system-ui"/>
+              </a:rPr>
+              <a:t>immutable</a:t>
+            </a:r>
+            <a:r>
+              <a:rPr lang="ru-RU" b="0" i="0" dirty="0">
+                <a:solidFill>
+                  <a:srgbClr val="F7F8FC"/>
+                </a:solidFill>
+                <a:effectLst/>
+                <a:latin typeface="system-ui"/>
+              </a:rPr>
+              <a:t>), так как </a:t>
+            </a:r>
+            <a:r>
+              <a:rPr lang="ru-RU" b="0" i="0" dirty="0" err="1">
+                <a:solidFill>
+                  <a:srgbClr val="F7F8FC"/>
+                </a:solidFill>
+                <a:effectLst/>
+                <a:latin typeface="system-ui"/>
+              </a:rPr>
+              <a:t>Splay</a:t>
+            </a:r>
+            <a:r>
+              <a:rPr lang="ru-RU" b="0" i="0" dirty="0">
+                <a:solidFill>
+                  <a:srgbClr val="F7F8FC"/>
+                </a:solidFill>
+                <a:effectLst/>
+                <a:latin typeface="system-ui"/>
+              </a:rPr>
+              <a:t> меняет дерево даже при чтении</a:t>
+            </a:r>
+          </a:p>
+        </p:txBody>
+      </p:sp>
+    </p:spTree>
+    <p:extLst>
+      <p:ext uri="{BB962C8B-B14F-4D97-AF65-F5344CB8AC3E}">
+        <p14:creationId xmlns:p14="http://schemas.microsoft.com/office/powerpoint/2010/main" val="3343693182"/>
       </p:ext>
     </p:extLst>
   </p:cSld>
@@ -4384,6 +5800,247 @@
 </p:sld>
 </file>
 
+<file path=ppt/slides/slide20.xml><?xml version="1.0" encoding="utf-8"?>
+<p:sld xmlns:a="http://schemas.openxmlformats.org/drawingml/2006/main" xmlns:r="http://schemas.openxmlformats.org/officeDocument/2006/relationships" xmlns:p="http://schemas.openxmlformats.org/presentationml/2006/main">
+  <p:cSld>
+    <p:spTree>
+      <p:nvGrpSpPr>
+        <p:cNvPr id="1" name=""/>
+        <p:cNvGrpSpPr/>
+        <p:nvPr/>
+      </p:nvGrpSpPr>
+      <p:grpSpPr>
+        <a:xfrm>
+          <a:off x="0" y="0"/>
+          <a:ext cx="0" cy="0"/>
+          <a:chOff x="0" y="0"/>
+          <a:chExt cx="0" cy="0"/>
+        </a:xfrm>
+      </p:grpSpPr>
+      <p:sp>
+        <p:nvSpPr>
+          <p:cNvPr id="2" name="Заголовок 1">
+            <a:extLst>
+              <a:ext uri="{FF2B5EF4-FFF2-40B4-BE49-F238E27FC236}">
+                <a16:creationId xmlns:a16="http://schemas.microsoft.com/office/drawing/2014/main" id="{15CFF42F-642A-4236-BCAB-B056B4B1E1D6}"/>
+              </a:ext>
+            </a:extLst>
+          </p:cNvPr>
+          <p:cNvSpPr>
+            <a:spLocks noGrp="1"/>
+          </p:cNvSpPr>
+          <p:nvPr>
+            <p:ph type="title"/>
+          </p:nvPr>
+        </p:nvSpPr>
+        <p:spPr/>
+        <p:txBody>
+          <a:bodyPr/>
+          <a:lstStyle/>
+          <a:p>
+            <a:r>
+              <a:rPr lang="ru-RU" dirty="0"/>
+              <a:t>конец </a:t>
+            </a:r>
+            <a:r>
+              <a:rPr lang="en-US" dirty="0"/>
+              <a:t>[</a:t>
+            </a:r>
+            <a:r>
+              <a:rPr lang="ru-RU" dirty="0" err="1"/>
+              <a:t>ноготочки</a:t>
+            </a:r>
+            <a:r>
+              <a:rPr lang="en-US" dirty="0"/>
+              <a:t>]</a:t>
+            </a:r>
+            <a:r>
+              <a:rPr lang="ru-RU" b="1" i="0" u="none" strike="noStrike" dirty="0">
+                <a:solidFill>
+                  <a:srgbClr val="8BB4DD"/>
+                </a:solidFill>
+                <a:effectLst/>
+                <a:latin typeface="YS Text"/>
+                <a:hlinkClick r:id="rId2"/>
+              </a:rPr>
+              <a:t> 💅🏻 💅🏻 💅🏻</a:t>
+            </a:r>
+            <a:endParaRPr lang="ru-RU" dirty="0"/>
+          </a:p>
+        </p:txBody>
+      </p:sp>
+      <p:pic>
+        <p:nvPicPr>
+          <p:cNvPr id="4098" name="Picture 2" descr="Picture background">
+            <a:extLst>
+              <a:ext uri="{FF2B5EF4-FFF2-40B4-BE49-F238E27FC236}">
+                <a16:creationId xmlns:a16="http://schemas.microsoft.com/office/drawing/2014/main" id="{29F89052-A295-4549-9AAF-C375F9E6AB8C}"/>
+              </a:ext>
+            </a:extLst>
+          </p:cNvPr>
+          <p:cNvPicPr>
+            <a:picLocks noGrp="1" noChangeAspect="1" noChangeArrowheads="1"/>
+          </p:cNvPicPr>
+          <p:nvPr>
+            <p:ph idx="1"/>
+          </p:nvPr>
+        </p:nvPicPr>
+        <p:blipFill>
+          <a:blip r:embed="rId3">
+            <a:extLst>
+              <a:ext uri="{28A0092B-C50C-407E-A947-70E740481C1C}">
+                <a14:useLocalDpi xmlns:a14="http://schemas.microsoft.com/office/drawing/2010/main" val="0"/>
+              </a:ext>
+            </a:extLst>
+          </a:blip>
+          <a:srcRect/>
+          <a:stretch>
+            <a:fillRect/>
+          </a:stretch>
+        </p:blipFill>
+        <p:spPr bwMode="auto">
+          <a:xfrm>
+            <a:off x="2095649" y="2286000"/>
+            <a:ext cx="8000701" cy="3817938"/>
+          </a:xfrm>
+          <a:prstGeom prst="rect">
+            <a:avLst/>
+          </a:prstGeom>
+          <a:noFill/>
+          <a:extLst>
+            <a:ext uri="{909E8E84-426E-40DD-AFC4-6F175D3DCCD1}">
+              <a14:hiddenFill xmlns:a14="http://schemas.microsoft.com/office/drawing/2010/main">
+                <a:solidFill>
+                  <a:srgbClr val="FFFFFF"/>
+                </a:solidFill>
+              </a14:hiddenFill>
+            </a:ext>
+          </a:extLst>
+        </p:spPr>
+      </p:pic>
+    </p:spTree>
+    <p:extLst>
+      <p:ext uri="{BB962C8B-B14F-4D97-AF65-F5344CB8AC3E}">
+        <p14:creationId xmlns:p14="http://schemas.microsoft.com/office/powerpoint/2010/main" val="1728894285"/>
+      </p:ext>
+    </p:extLst>
+  </p:cSld>
+  <p:clrMapOvr>
+    <a:masterClrMapping/>
+  </p:clrMapOvr>
+</p:sld>
+</file>
+
+<file path=ppt/slides/slide21.xml><?xml version="1.0" encoding="utf-8"?>
+<p:sld xmlns:a="http://schemas.openxmlformats.org/drawingml/2006/main" xmlns:r="http://schemas.openxmlformats.org/officeDocument/2006/relationships" xmlns:p="http://schemas.openxmlformats.org/presentationml/2006/main">
+  <p:cSld>
+    <p:spTree>
+      <p:nvGrpSpPr>
+        <p:cNvPr id="1" name=""/>
+        <p:cNvGrpSpPr/>
+        <p:nvPr/>
+      </p:nvGrpSpPr>
+      <p:grpSpPr>
+        <a:xfrm>
+          <a:off x="0" y="0"/>
+          <a:ext cx="0" cy="0"/>
+          <a:chOff x="0" y="0"/>
+          <a:chExt cx="0" cy="0"/>
+        </a:xfrm>
+      </p:grpSpPr>
+      <p:sp>
+        <p:nvSpPr>
+          <p:cNvPr id="2" name="Заголовок 1">
+            <a:extLst>
+              <a:ext uri="{FF2B5EF4-FFF2-40B4-BE49-F238E27FC236}">
+                <a16:creationId xmlns:a16="http://schemas.microsoft.com/office/drawing/2014/main" id="{D8358825-8093-47FB-9DA3-9B7B665FADD1}"/>
+              </a:ext>
+            </a:extLst>
+          </p:cNvPr>
+          <p:cNvSpPr>
+            <a:spLocks noGrp="1"/>
+          </p:cNvSpPr>
+          <p:nvPr>
+            <p:ph type="title"/>
+          </p:nvPr>
+        </p:nvSpPr>
+        <p:spPr>
+          <a:xfrm>
+            <a:off x="762000" y="147145"/>
+            <a:ext cx="10668000" cy="1524000"/>
+          </a:xfrm>
+        </p:spPr>
+        <p:txBody>
+          <a:bodyPr/>
+          <a:lstStyle/>
+          <a:p>
+            <a:r>
+              <a:rPr lang="en-US" dirty="0"/>
+              <a:t>git</a:t>
+            </a:r>
+            <a:r>
+              <a:rPr lang="ru-RU" b="1" i="0" u="none" strike="noStrike" dirty="0">
+                <a:solidFill>
+                  <a:srgbClr val="8BB4DD"/>
+                </a:solidFill>
+                <a:effectLst/>
+                <a:latin typeface="YS Text"/>
+                <a:hlinkClick r:id="rId2"/>
+              </a:rPr>
+              <a:t> 💅🏻</a:t>
+            </a:r>
+            <a:endParaRPr lang="ru-RU" dirty="0"/>
+          </a:p>
+        </p:txBody>
+      </p:sp>
+      <p:pic>
+        <p:nvPicPr>
+          <p:cNvPr id="5" name="Объект 4">
+            <a:extLst>
+              <a:ext uri="{FF2B5EF4-FFF2-40B4-BE49-F238E27FC236}">
+                <a16:creationId xmlns:a16="http://schemas.microsoft.com/office/drawing/2014/main" id="{EB3B1121-4FBD-47C6-B238-8506AC7C181E}"/>
+              </a:ext>
+            </a:extLst>
+          </p:cNvPr>
+          <p:cNvPicPr>
+            <a:picLocks noGrp="1" noChangeAspect="1"/>
+          </p:cNvPicPr>
+          <p:nvPr>
+            <p:ph idx="1"/>
+          </p:nvPr>
+        </p:nvPicPr>
+        <p:blipFill>
+          <a:blip r:embed="rId3">
+            <a:extLst>
+              <a:ext uri="{28A0092B-C50C-407E-A947-70E740481C1C}">
+                <a14:useLocalDpi xmlns:a14="http://schemas.microsoft.com/office/drawing/2010/main" val="0"/>
+              </a:ext>
+            </a:extLst>
+          </a:blip>
+          <a:stretch>
+            <a:fillRect/>
+          </a:stretch>
+        </p:blipFill>
+        <p:spPr>
+          <a:xfrm>
+            <a:off x="3294993" y="1255986"/>
+            <a:ext cx="5602014" cy="5602014"/>
+          </a:xfrm>
+        </p:spPr>
+      </p:pic>
+    </p:spTree>
+    <p:extLst>
+      <p:ext uri="{BB962C8B-B14F-4D97-AF65-F5344CB8AC3E}">
+        <p14:creationId xmlns:p14="http://schemas.microsoft.com/office/powerpoint/2010/main" val="1067603751"/>
+      </p:ext>
+    </p:extLst>
+  </p:cSld>
+  <p:clrMapOvr>
+    <a:masterClrMapping/>
+  </p:clrMapOvr>
+</p:sld>
+</file>
+
 <file path=ppt/slides/slide3.xml><?xml version="1.0" encoding="utf-8"?>
 <p:sld xmlns:a="http://schemas.openxmlformats.org/drawingml/2006/main" xmlns:r="http://schemas.openxmlformats.org/officeDocument/2006/relationships" xmlns:p="http://schemas.openxmlformats.org/presentationml/2006/main">
   <p:cSld>
@@ -4472,10 +6129,55 @@
         </p:nvSpPr>
         <p:spPr/>
         <p:txBody>
-          <a:bodyPr/>
-          <a:lstStyle/>
-          <a:p>
-            <a:endParaRPr lang="ru-RU"/>
+          <a:bodyPr>
+            <a:normAutofit fontScale="85000" lnSpcReduction="10000"/>
+          </a:bodyPr>
+          <a:lstStyle/>
+          <a:p>
+            <a:pPr marL="0" indent="0">
+              <a:buNone/>
+            </a:pPr>
+            <a:r>
+              <a:rPr lang="ru-RU" dirty="0" err="1"/>
+              <a:t>Splay</a:t>
+            </a:r>
+            <a:r>
+              <a:rPr lang="ru-RU" dirty="0"/>
+              <a:t> </a:t>
+            </a:r>
+            <a:r>
+              <a:rPr lang="ru-RU" dirty="0" err="1"/>
+              <a:t>Tree</a:t>
+            </a:r>
+            <a:r>
+              <a:rPr lang="ru-RU" dirty="0"/>
+              <a:t> (Расширяющееся дерево) — это самоорганизующаяся структура данных. Его главная идея строится на наблюдении из реальной жизни: если мы обратились к элементу, велика вероятность, что мы обратимся к нему снова в ближайшее время.</a:t>
+            </a:r>
+          </a:p>
+          <a:p>
+            <a:pPr marL="0" indent="0">
+              <a:buNone/>
+            </a:pPr>
+            <a:r>
+              <a:rPr lang="ru-RU" dirty="0"/>
+              <a:t>В отличие от других деревьев (например, AVL или Красно-черных), которые стремятся всегда быть идеально сбалансированными, </a:t>
+            </a:r>
+            <a:r>
+              <a:rPr lang="ru-RU" dirty="0" err="1"/>
+              <a:t>Splay</a:t>
+            </a:r>
+            <a:r>
+              <a:rPr lang="ru-RU" dirty="0"/>
+              <a:t> </a:t>
+            </a:r>
+            <a:r>
+              <a:rPr lang="ru-RU" dirty="0" err="1"/>
+              <a:t>Tree</a:t>
+            </a:r>
+            <a:r>
+              <a:rPr lang="ru-RU" dirty="0"/>
+              <a:t> не заботится о балансе в конкретный момент времени. Оно заботится о том, чтобы часто используемые данные были легко доступны.</a:t>
+            </a:r>
           </a:p>
         </p:txBody>
       </p:sp>
@@ -4483,6 +6185,932 @@
     <p:extLst>
       <p:ext uri="{BB962C8B-B14F-4D97-AF65-F5344CB8AC3E}">
         <p14:creationId xmlns:p14="http://schemas.microsoft.com/office/powerpoint/2010/main" val="2626941824"/>
+      </p:ext>
+    </p:extLst>
+  </p:cSld>
+  <p:clrMapOvr>
+    <a:masterClrMapping/>
+  </p:clrMapOvr>
+</p:sld>
+</file>
+
+<file path=ppt/slides/slide4.xml><?xml version="1.0" encoding="utf-8"?>
+<p:sld xmlns:a="http://schemas.openxmlformats.org/drawingml/2006/main" xmlns:r="http://schemas.openxmlformats.org/officeDocument/2006/relationships" xmlns:p="http://schemas.openxmlformats.org/presentationml/2006/main">
+  <p:cSld>
+    <p:spTree>
+      <p:nvGrpSpPr>
+        <p:cNvPr id="1" name=""/>
+        <p:cNvGrpSpPr/>
+        <p:nvPr/>
+      </p:nvGrpSpPr>
+      <p:grpSpPr>
+        <a:xfrm>
+          <a:off x="0" y="0"/>
+          <a:ext cx="0" cy="0"/>
+          <a:chOff x="0" y="0"/>
+          <a:chExt cx="0" cy="0"/>
+        </a:xfrm>
+      </p:grpSpPr>
+      <p:sp>
+        <p:nvSpPr>
+          <p:cNvPr id="2" name="Заголовок 1">
+            <a:extLst>
+              <a:ext uri="{FF2B5EF4-FFF2-40B4-BE49-F238E27FC236}">
+                <a16:creationId xmlns:a16="http://schemas.microsoft.com/office/drawing/2014/main" id="{9812611A-A633-4774-929D-BE198503F151}"/>
+              </a:ext>
+            </a:extLst>
+          </p:cNvPr>
+          <p:cNvSpPr>
+            <a:spLocks noGrp="1"/>
+          </p:cNvSpPr>
+          <p:nvPr>
+            <p:ph type="title"/>
+          </p:nvPr>
+        </p:nvSpPr>
+        <p:spPr/>
+        <p:txBody>
+          <a:bodyPr/>
+          <a:lstStyle/>
+          <a:p>
+            <a:r>
+              <a:rPr lang="ru-RU" dirty="0"/>
+              <a:t>Принцип</a:t>
+            </a:r>
+            <a:r>
+              <a:rPr lang="en-US" dirty="0"/>
+              <a:t> s(p)lay</a:t>
+            </a:r>
+            <a:r>
+              <a:rPr lang="ru-RU" b="1" i="0" u="none" strike="noStrike" dirty="0">
+                <a:solidFill>
+                  <a:srgbClr val="8BB4DD"/>
+                </a:solidFill>
+                <a:effectLst/>
+                <a:latin typeface="YS Text"/>
+                <a:hlinkClick r:id="rId2"/>
+              </a:rPr>
+              <a:t> 💅🏻</a:t>
+            </a:r>
+            <a:endParaRPr lang="ru-RU" dirty="0"/>
+          </a:p>
+        </p:txBody>
+      </p:sp>
+      <p:sp>
+        <p:nvSpPr>
+          <p:cNvPr id="3" name="Объект 2">
+            <a:extLst>
+              <a:ext uri="{FF2B5EF4-FFF2-40B4-BE49-F238E27FC236}">
+                <a16:creationId xmlns:a16="http://schemas.microsoft.com/office/drawing/2014/main" id="{A35DC2F8-A8F7-4AE5-812E-779FA76AA973}"/>
+              </a:ext>
+            </a:extLst>
+          </p:cNvPr>
+          <p:cNvSpPr>
+            <a:spLocks noGrp="1"/>
+          </p:cNvSpPr>
+          <p:nvPr>
+            <p:ph idx="1"/>
+          </p:nvPr>
+        </p:nvSpPr>
+        <p:spPr/>
+        <p:txBody>
+          <a:bodyPr>
+            <a:normAutofit/>
+          </a:bodyPr>
+          <a:lstStyle/>
+          <a:p>
+            <a:r>
+              <a:rPr lang="ru-RU" dirty="0"/>
+              <a:t>"</a:t>
+            </a:r>
+            <a:r>
+              <a:rPr lang="ru-RU" dirty="0" err="1"/>
+              <a:t>splay</a:t>
+            </a:r>
+            <a:r>
+              <a:rPr lang="ru-RU" dirty="0"/>
+              <a:t>" делится на 3 случая:</a:t>
+            </a:r>
+          </a:p>
+          <a:p>
+            <a:pPr marL="0" indent="0">
+              <a:buNone/>
+            </a:pPr>
+            <a:r>
+              <a:rPr lang="en-US" dirty="0"/>
+              <a:t>Z</a:t>
+            </a:r>
+            <a:r>
+              <a:rPr lang="ru-RU" dirty="0" err="1"/>
+              <a:t>ig</a:t>
+            </a:r>
+            <a:r>
+              <a:rPr lang="ru-RU" dirty="0"/>
+              <a:t>: Если p — корень дерева с сыном x, то совершаем один поворот вокруг ребра (</a:t>
+            </a:r>
+            <a:r>
+              <a:rPr lang="ru-RU" dirty="0" err="1"/>
+              <a:t>x,p</a:t>
+            </a:r>
+            <a:r>
+              <a:rPr lang="ru-RU" dirty="0"/>
+              <a:t>), делая x корнем дерева. </a:t>
+            </a:r>
+          </a:p>
+        </p:txBody>
+      </p:sp>
+      <p:pic>
+        <p:nvPicPr>
+          <p:cNvPr id="1030" name="Picture 6">
+            <a:extLst>
+              <a:ext uri="{FF2B5EF4-FFF2-40B4-BE49-F238E27FC236}">
+                <a16:creationId xmlns:a16="http://schemas.microsoft.com/office/drawing/2014/main" id="{3A7E213F-D432-4932-B8E4-C3D54479B7AC}"/>
+              </a:ext>
+            </a:extLst>
+          </p:cNvPr>
+          <p:cNvPicPr>
+            <a:picLocks noChangeAspect="1" noChangeArrowheads="1"/>
+          </p:cNvPicPr>
+          <p:nvPr/>
+        </p:nvPicPr>
+        <p:blipFill>
+          <a:blip r:embed="rId3">
+            <a:extLst>
+              <a:ext uri="{28A0092B-C50C-407E-A947-70E740481C1C}">
+                <a14:useLocalDpi xmlns:a14="http://schemas.microsoft.com/office/drawing/2010/main" val="0"/>
+              </a:ext>
+            </a:extLst>
+          </a:blip>
+          <a:srcRect/>
+          <a:stretch>
+            <a:fillRect/>
+          </a:stretch>
+        </p:blipFill>
+        <p:spPr bwMode="auto">
+          <a:xfrm>
+            <a:off x="2364828" y="4195041"/>
+            <a:ext cx="7462344" cy="1774250"/>
+          </a:xfrm>
+          <a:prstGeom prst="rect">
+            <a:avLst/>
+          </a:prstGeom>
+          <a:noFill/>
+          <a:extLst>
+            <a:ext uri="{909E8E84-426E-40DD-AFC4-6F175D3DCCD1}">
+              <a14:hiddenFill xmlns:a14="http://schemas.microsoft.com/office/drawing/2010/main">
+                <a:solidFill>
+                  <a:srgbClr val="FFFFFF"/>
+                </a:solidFill>
+              </a14:hiddenFill>
+            </a:ext>
+          </a:extLst>
+        </p:spPr>
+      </p:pic>
+    </p:spTree>
+    <p:extLst>
+      <p:ext uri="{BB962C8B-B14F-4D97-AF65-F5344CB8AC3E}">
+        <p14:creationId xmlns:p14="http://schemas.microsoft.com/office/powerpoint/2010/main" val="574333457"/>
+      </p:ext>
+    </p:extLst>
+  </p:cSld>
+  <p:clrMapOvr>
+    <a:masterClrMapping/>
+  </p:clrMapOvr>
+</p:sld>
+</file>
+
+<file path=ppt/slides/slide5.xml><?xml version="1.0" encoding="utf-8"?>
+<p:sld xmlns:a="http://schemas.openxmlformats.org/drawingml/2006/main" xmlns:r="http://schemas.openxmlformats.org/officeDocument/2006/relationships" xmlns:p="http://schemas.openxmlformats.org/presentationml/2006/main">
+  <p:cSld>
+    <p:spTree>
+      <p:nvGrpSpPr>
+        <p:cNvPr id="1" name=""/>
+        <p:cNvGrpSpPr/>
+        <p:nvPr/>
+      </p:nvGrpSpPr>
+      <p:grpSpPr>
+        <a:xfrm>
+          <a:off x="0" y="0"/>
+          <a:ext cx="0" cy="0"/>
+          <a:chOff x="0" y="0"/>
+          <a:chExt cx="0" cy="0"/>
+        </a:xfrm>
+      </p:grpSpPr>
+      <p:sp>
+        <p:nvSpPr>
+          <p:cNvPr id="3" name="Объект 2">
+            <a:extLst>
+              <a:ext uri="{FF2B5EF4-FFF2-40B4-BE49-F238E27FC236}">
+                <a16:creationId xmlns:a16="http://schemas.microsoft.com/office/drawing/2014/main" id="{C8394486-9720-4447-96CF-0540829F6BCC}"/>
+              </a:ext>
+            </a:extLst>
+          </p:cNvPr>
+          <p:cNvSpPr>
+            <a:spLocks noGrp="1"/>
+          </p:cNvSpPr>
+          <p:nvPr>
+            <p:ph idx="1"/>
+          </p:nvPr>
+        </p:nvSpPr>
+        <p:spPr>
+          <a:xfrm>
+            <a:off x="762000" y="646386"/>
+            <a:ext cx="10668000" cy="3818083"/>
+          </a:xfrm>
+        </p:spPr>
+        <p:txBody>
+          <a:bodyPr>
+            <a:normAutofit/>
+          </a:bodyPr>
+          <a:lstStyle/>
+          <a:p>
+            <a:r>
+              <a:rPr lang="ru-RU" dirty="0" err="1"/>
+              <a:t>zig-zig</a:t>
+            </a:r>
+            <a:r>
+              <a:rPr lang="ru-RU" dirty="0"/>
+              <a:t>: Если p — не корень дерева, а x и p — оба левые или оба правые дети, то делаем поворот ребра (</a:t>
+            </a:r>
+            <a:r>
+              <a:rPr lang="ru-RU" dirty="0" err="1"/>
+              <a:t>p,g</a:t>
+            </a:r>
+            <a:r>
+              <a:rPr lang="ru-RU" dirty="0"/>
+              <a:t>), где g — отец p, а затем поворот ребра (</a:t>
+            </a:r>
+            <a:r>
+              <a:rPr lang="ru-RU" dirty="0" err="1"/>
+              <a:t>x,p</a:t>
+            </a:r>
+            <a:r>
+              <a:rPr lang="ru-RU" dirty="0"/>
+              <a:t>)</a:t>
+            </a:r>
+          </a:p>
+          <a:p>
+            <a:pPr marL="0" indent="0">
+              <a:buNone/>
+            </a:pPr>
+            <a:endParaRPr lang="ru-RU" dirty="0"/>
+          </a:p>
+        </p:txBody>
+      </p:sp>
+      <p:pic>
+        <p:nvPicPr>
+          <p:cNvPr id="2054" name="Picture 6">
+            <a:extLst>
+              <a:ext uri="{FF2B5EF4-FFF2-40B4-BE49-F238E27FC236}">
+                <a16:creationId xmlns:a16="http://schemas.microsoft.com/office/drawing/2014/main" id="{7325A555-545D-480A-BBC4-0800E876CF80}"/>
+              </a:ext>
+            </a:extLst>
+          </p:cNvPr>
+          <p:cNvPicPr>
+            <a:picLocks noChangeAspect="1" noChangeArrowheads="1"/>
+          </p:cNvPicPr>
+          <p:nvPr/>
+        </p:nvPicPr>
+        <p:blipFill>
+          <a:blip r:embed="rId2">
+            <a:extLst>
+              <a:ext uri="{28A0092B-C50C-407E-A947-70E740481C1C}">
+                <a14:useLocalDpi xmlns:a14="http://schemas.microsoft.com/office/drawing/2010/main" val="0"/>
+              </a:ext>
+            </a:extLst>
+          </a:blip>
+          <a:srcRect/>
+          <a:stretch>
+            <a:fillRect/>
+          </a:stretch>
+        </p:blipFill>
+        <p:spPr bwMode="auto">
+          <a:xfrm>
+            <a:off x="2518922" y="2302306"/>
+            <a:ext cx="7154156" cy="4324326"/>
+          </a:xfrm>
+          <a:prstGeom prst="rect">
+            <a:avLst/>
+          </a:prstGeom>
+          <a:noFill/>
+          <a:extLst>
+            <a:ext uri="{909E8E84-426E-40DD-AFC4-6F175D3DCCD1}">
+              <a14:hiddenFill xmlns:a14="http://schemas.microsoft.com/office/drawing/2010/main">
+                <a:solidFill>
+                  <a:srgbClr val="FFFFFF"/>
+                </a:solidFill>
+              </a14:hiddenFill>
+            </a:ext>
+          </a:extLst>
+        </p:spPr>
+      </p:pic>
+    </p:spTree>
+    <p:extLst>
+      <p:ext uri="{BB962C8B-B14F-4D97-AF65-F5344CB8AC3E}">
+        <p14:creationId xmlns:p14="http://schemas.microsoft.com/office/powerpoint/2010/main" val="1529800227"/>
+      </p:ext>
+    </p:extLst>
+  </p:cSld>
+  <p:clrMapOvr>
+    <a:masterClrMapping/>
+  </p:clrMapOvr>
+</p:sld>
+</file>
+
+<file path=ppt/slides/slide6.xml><?xml version="1.0" encoding="utf-8"?>
+<p:sld xmlns:a="http://schemas.openxmlformats.org/drawingml/2006/main" xmlns:r="http://schemas.openxmlformats.org/officeDocument/2006/relationships" xmlns:p="http://schemas.openxmlformats.org/presentationml/2006/main">
+  <p:cSld>
+    <p:spTree>
+      <p:nvGrpSpPr>
+        <p:cNvPr id="1" name=""/>
+        <p:cNvGrpSpPr/>
+        <p:nvPr/>
+      </p:nvGrpSpPr>
+      <p:grpSpPr>
+        <a:xfrm>
+          <a:off x="0" y="0"/>
+          <a:ext cx="0" cy="0"/>
+          <a:chOff x="0" y="0"/>
+          <a:chExt cx="0" cy="0"/>
+        </a:xfrm>
+      </p:grpSpPr>
+      <p:sp>
+        <p:nvSpPr>
+          <p:cNvPr id="3" name="Объект 2">
+            <a:extLst>
+              <a:ext uri="{FF2B5EF4-FFF2-40B4-BE49-F238E27FC236}">
+                <a16:creationId xmlns:a16="http://schemas.microsoft.com/office/drawing/2014/main" id="{C8394486-9720-4447-96CF-0540829F6BCC}"/>
+              </a:ext>
+            </a:extLst>
+          </p:cNvPr>
+          <p:cNvSpPr>
+            <a:spLocks noGrp="1"/>
+          </p:cNvSpPr>
+          <p:nvPr>
+            <p:ph idx="1"/>
+          </p:nvPr>
+        </p:nvSpPr>
+        <p:spPr>
+          <a:xfrm>
+            <a:off x="762000" y="646386"/>
+            <a:ext cx="10668000" cy="3818083"/>
+          </a:xfrm>
+        </p:spPr>
+        <p:txBody>
+          <a:bodyPr>
+            <a:normAutofit/>
+          </a:bodyPr>
+          <a:lstStyle/>
+          <a:p>
+            <a:r>
+              <a:rPr lang="ru-RU" dirty="0" err="1"/>
+              <a:t>zig-zag</a:t>
+            </a:r>
+            <a:r>
+              <a:rPr lang="ru-RU" dirty="0"/>
+              <a:t>: Если p — не корень дерева и x — левый ребенок, а p — правый, или наоборот, то делаем поворот вокруг ребра (</a:t>
+            </a:r>
+            <a:r>
+              <a:rPr lang="ru-RU" dirty="0" err="1"/>
+              <a:t>x,p</a:t>
+            </a:r>
+            <a:r>
+              <a:rPr lang="ru-RU" dirty="0"/>
+              <a:t>), а затем поворот нового ребра (</a:t>
+            </a:r>
+            <a:r>
+              <a:rPr lang="ru-RU" dirty="0" err="1"/>
+              <a:t>x,g</a:t>
+            </a:r>
+            <a:r>
+              <a:rPr lang="ru-RU" dirty="0"/>
+              <a:t>), где g — бывший родитель p.</a:t>
+            </a:r>
+          </a:p>
+        </p:txBody>
+      </p:sp>
+      <p:pic>
+        <p:nvPicPr>
+          <p:cNvPr id="2054" name="Picture 6">
+            <a:extLst>
+              <a:ext uri="{FF2B5EF4-FFF2-40B4-BE49-F238E27FC236}">
+                <a16:creationId xmlns:a16="http://schemas.microsoft.com/office/drawing/2014/main" id="{7325A555-545D-480A-BBC4-0800E876CF80}"/>
+              </a:ext>
+            </a:extLst>
+          </p:cNvPr>
+          <p:cNvPicPr>
+            <a:picLocks noChangeAspect="1" noChangeArrowheads="1"/>
+          </p:cNvPicPr>
+          <p:nvPr/>
+        </p:nvPicPr>
+        <p:blipFill>
+          <a:blip r:embed="rId2">
+            <a:extLst>
+              <a:ext uri="{28A0092B-C50C-407E-A947-70E740481C1C}">
+                <a14:useLocalDpi xmlns:a14="http://schemas.microsoft.com/office/drawing/2010/main" val="0"/>
+              </a:ext>
+            </a:extLst>
+          </a:blip>
+          <a:srcRect/>
+          <a:stretch>
+            <a:fillRect/>
+          </a:stretch>
+        </p:blipFill>
+        <p:spPr bwMode="auto">
+          <a:xfrm>
+            <a:off x="2518922" y="2302306"/>
+            <a:ext cx="7154156" cy="4324326"/>
+          </a:xfrm>
+          <a:prstGeom prst="rect">
+            <a:avLst/>
+          </a:prstGeom>
+          <a:noFill/>
+          <a:extLst>
+            <a:ext uri="{909E8E84-426E-40DD-AFC4-6F175D3DCCD1}">
+              <a14:hiddenFill xmlns:a14="http://schemas.microsoft.com/office/drawing/2010/main">
+                <a:solidFill>
+                  <a:srgbClr val="FFFFFF"/>
+                </a:solidFill>
+              </a14:hiddenFill>
+            </a:ext>
+          </a:extLst>
+        </p:spPr>
+      </p:pic>
+    </p:spTree>
+    <p:extLst>
+      <p:ext uri="{BB962C8B-B14F-4D97-AF65-F5344CB8AC3E}">
+        <p14:creationId xmlns:p14="http://schemas.microsoft.com/office/powerpoint/2010/main" val="245255053"/>
+      </p:ext>
+    </p:extLst>
+  </p:cSld>
+  <p:clrMapOvr>
+    <a:masterClrMapping/>
+  </p:clrMapOvr>
+</p:sld>
+</file>
+
+<file path=ppt/slides/slide7.xml><?xml version="1.0" encoding="utf-8"?>
+<p:sld xmlns:a="http://schemas.openxmlformats.org/drawingml/2006/main" xmlns:r="http://schemas.openxmlformats.org/officeDocument/2006/relationships" xmlns:p="http://schemas.openxmlformats.org/presentationml/2006/main">
+  <p:cSld>
+    <p:spTree>
+      <p:nvGrpSpPr>
+        <p:cNvPr id="1" name=""/>
+        <p:cNvGrpSpPr/>
+        <p:nvPr/>
+      </p:nvGrpSpPr>
+      <p:grpSpPr>
+        <a:xfrm>
+          <a:off x="0" y="0"/>
+          <a:ext cx="0" cy="0"/>
+          <a:chOff x="0" y="0"/>
+          <a:chExt cx="0" cy="0"/>
+        </a:xfrm>
+      </p:grpSpPr>
+      <p:sp>
+        <p:nvSpPr>
+          <p:cNvPr id="2" name="Заголовок 1">
+            <a:extLst>
+              <a:ext uri="{FF2B5EF4-FFF2-40B4-BE49-F238E27FC236}">
+                <a16:creationId xmlns:a16="http://schemas.microsoft.com/office/drawing/2014/main" id="{85438C4E-B621-44DF-8D0C-8525C0661CA2}"/>
+              </a:ext>
+            </a:extLst>
+          </p:cNvPr>
+          <p:cNvSpPr>
+            <a:spLocks noGrp="1"/>
+          </p:cNvSpPr>
+          <p:nvPr>
+            <p:ph type="title"/>
+          </p:nvPr>
+        </p:nvSpPr>
+        <p:spPr/>
+        <p:txBody>
+          <a:bodyPr/>
+          <a:lstStyle/>
+          <a:p>
+            <a:r>
+              <a:rPr lang="ru-RU" dirty="0"/>
+              <a:t>Поиск</a:t>
+            </a:r>
+            <a:r>
+              <a:rPr lang="ru-RU" b="1" i="0" u="none" strike="noStrike" dirty="0">
+                <a:solidFill>
+                  <a:srgbClr val="8BB4DD"/>
+                </a:solidFill>
+                <a:effectLst/>
+                <a:latin typeface="YS Text"/>
+                <a:hlinkClick r:id="rId2"/>
+              </a:rPr>
+              <a:t> 💅🏻</a:t>
+            </a:r>
+            <a:endParaRPr lang="ru-RU" dirty="0"/>
+          </a:p>
+        </p:txBody>
+      </p:sp>
+      <p:sp>
+        <p:nvSpPr>
+          <p:cNvPr id="3" name="Объект 2">
+            <a:extLst>
+              <a:ext uri="{FF2B5EF4-FFF2-40B4-BE49-F238E27FC236}">
+                <a16:creationId xmlns:a16="http://schemas.microsoft.com/office/drawing/2014/main" id="{9D157B9D-AB11-4126-A144-679D23275628}"/>
+              </a:ext>
+            </a:extLst>
+          </p:cNvPr>
+          <p:cNvSpPr>
+            <a:spLocks noGrp="1"/>
+          </p:cNvSpPr>
+          <p:nvPr>
+            <p:ph idx="1"/>
+          </p:nvPr>
+        </p:nvSpPr>
+        <p:spPr>
+          <a:xfrm>
+            <a:off x="762000" y="1776846"/>
+            <a:ext cx="10983310" cy="4718548"/>
+          </a:xfrm>
+        </p:spPr>
+        <p:txBody>
+          <a:bodyPr>
+            <a:normAutofit fontScale="85000" lnSpcReduction="10000"/>
+          </a:bodyPr>
+          <a:lstStyle/>
+          <a:p>
+            <a:pPr marL="0" indent="0">
+              <a:buNone/>
+            </a:pPr>
+            <a:r>
+              <a:rPr lang="ru-RU" dirty="0"/>
+              <a:t>Спуск: Мы начинаем с корня и идем вниз, сравнивая искомое число с текущим узлом. Если ищем меньшее — идем влево, если большее — вправо.</a:t>
+            </a:r>
+          </a:p>
+          <a:p>
+            <a:pPr marL="0" indent="0">
+              <a:buNone/>
+            </a:pPr>
+            <a:r>
+              <a:rPr lang="ru-RU" dirty="0"/>
+              <a:t>Фиксация последнего: Мы запоминаем последний узел, на котором остановились (даже если искомое число не нашли, мы запомнили «ближайшего соседа»).</a:t>
+            </a:r>
+          </a:p>
+          <a:p>
+            <a:pPr marL="0" indent="0">
+              <a:buNone/>
+            </a:pPr>
+            <a:r>
+              <a:rPr lang="ru-RU" dirty="0"/>
+              <a:t>Подтягивание (</a:t>
+            </a:r>
+            <a:r>
+              <a:rPr lang="ru-RU" dirty="0" err="1"/>
+              <a:t>Splay</a:t>
+            </a:r>
+            <a:r>
+              <a:rPr lang="ru-RU" dirty="0"/>
+              <a:t>):</a:t>
+            </a:r>
+          </a:p>
+          <a:p>
+            <a:r>
+              <a:rPr lang="ru-RU" dirty="0"/>
+              <a:t>Если число нашли: мы берем этот найденный узел и с помощью поворотов поднимаем его в корень.</a:t>
+            </a:r>
+          </a:p>
+          <a:p>
+            <a:r>
+              <a:rPr lang="ru-RU" dirty="0"/>
+              <a:t>Если число не нашли: мы берем тот самый «последний посещенный узел» (ближайший по значению) и поднимаем его в корень.</a:t>
+            </a:r>
+          </a:p>
+        </p:txBody>
+      </p:sp>
+    </p:spTree>
+    <p:extLst>
+      <p:ext uri="{BB962C8B-B14F-4D97-AF65-F5344CB8AC3E}">
+        <p14:creationId xmlns:p14="http://schemas.microsoft.com/office/powerpoint/2010/main" val="2810101481"/>
+      </p:ext>
+    </p:extLst>
+  </p:cSld>
+  <p:clrMapOvr>
+    <a:masterClrMapping/>
+  </p:clrMapOvr>
+</p:sld>
+</file>
+
+<file path=ppt/slides/slide8.xml><?xml version="1.0" encoding="utf-8"?>
+<p:sld xmlns:a="http://schemas.openxmlformats.org/drawingml/2006/main" xmlns:r="http://schemas.openxmlformats.org/officeDocument/2006/relationships" xmlns:p="http://schemas.openxmlformats.org/presentationml/2006/main">
+  <p:cSld>
+    <p:spTree>
+      <p:nvGrpSpPr>
+        <p:cNvPr id="1" name=""/>
+        <p:cNvGrpSpPr/>
+        <p:nvPr/>
+      </p:nvGrpSpPr>
+      <p:grpSpPr>
+        <a:xfrm>
+          <a:off x="0" y="0"/>
+          <a:ext cx="0" cy="0"/>
+          <a:chOff x="0" y="0"/>
+          <a:chExt cx="0" cy="0"/>
+        </a:xfrm>
+      </p:grpSpPr>
+      <p:sp>
+        <p:nvSpPr>
+          <p:cNvPr id="2" name="Заголовок 1">
+            <a:extLst>
+              <a:ext uri="{FF2B5EF4-FFF2-40B4-BE49-F238E27FC236}">
+                <a16:creationId xmlns:a16="http://schemas.microsoft.com/office/drawing/2014/main" id="{71C4A3D1-7081-4F0E-9C1A-FB5B4A4DF803}"/>
+              </a:ext>
+            </a:extLst>
+          </p:cNvPr>
+          <p:cNvSpPr>
+            <a:spLocks noGrp="1"/>
+          </p:cNvSpPr>
+          <p:nvPr>
+            <p:ph type="title"/>
+          </p:nvPr>
+        </p:nvSpPr>
+        <p:spPr/>
+        <p:txBody>
+          <a:bodyPr/>
+          <a:lstStyle/>
+          <a:p>
+            <a:r>
+              <a:rPr lang="ru-RU" dirty="0"/>
+              <a:t>Вставка</a:t>
+            </a:r>
+            <a:r>
+              <a:rPr lang="ru-RU" b="1" i="0" u="none" strike="noStrike" dirty="0">
+                <a:solidFill>
+                  <a:srgbClr val="8BB4DD"/>
+                </a:solidFill>
+                <a:effectLst/>
+                <a:latin typeface="YS Text"/>
+                <a:hlinkClick r:id="rId2"/>
+              </a:rPr>
+              <a:t> 💅🏻</a:t>
+            </a:r>
+            <a:endParaRPr lang="ru-RU" dirty="0"/>
+          </a:p>
+        </p:txBody>
+      </p:sp>
+      <p:sp>
+        <p:nvSpPr>
+          <p:cNvPr id="3" name="Объект 2">
+            <a:extLst>
+              <a:ext uri="{FF2B5EF4-FFF2-40B4-BE49-F238E27FC236}">
+                <a16:creationId xmlns:a16="http://schemas.microsoft.com/office/drawing/2014/main" id="{BE01616B-3807-4DF8-BA3D-7036E68007B9}"/>
+              </a:ext>
+            </a:extLst>
+          </p:cNvPr>
+          <p:cNvSpPr>
+            <a:spLocks noGrp="1"/>
+          </p:cNvSpPr>
+          <p:nvPr>
+            <p:ph idx="1"/>
+          </p:nvPr>
+        </p:nvSpPr>
+        <p:spPr>
+          <a:xfrm>
+            <a:off x="762000" y="1766456"/>
+            <a:ext cx="10668000" cy="4337628"/>
+          </a:xfrm>
+        </p:spPr>
+        <p:txBody>
+          <a:bodyPr>
+            <a:normAutofit fontScale="77500" lnSpcReduction="20000"/>
+          </a:bodyPr>
+          <a:lstStyle/>
+          <a:p>
+            <a:pPr marL="0" indent="0">
+              <a:buNone/>
+            </a:pPr>
+            <a:r>
+              <a:rPr lang="ru-RU" dirty="0"/>
+              <a:t>Вставка состоит из двух этапов: сначала мы вставляем элемент как в обычное дерево, а потом «активируем» его.</a:t>
+            </a:r>
+          </a:p>
+          <a:p>
+            <a:pPr marL="0" indent="0">
+              <a:buNone/>
+            </a:pPr>
+            <a:r>
+              <a:rPr lang="ru-RU" dirty="0"/>
+              <a:t>Поиск места: Мы спускаемся от корня, пока не найдем пустое место (</a:t>
+            </a:r>
+            <a:r>
+              <a:rPr lang="ru-RU" dirty="0" err="1"/>
+              <a:t>null</a:t>
+            </a:r>
+            <a:r>
+              <a:rPr lang="ru-RU" dirty="0"/>
+              <a:t>), куда можно прицепить новый узел.</a:t>
+            </a:r>
+          </a:p>
+          <a:p>
+            <a:pPr marL="0" indent="0">
+              <a:buNone/>
+            </a:pPr>
+            <a:r>
+              <a:rPr lang="ru-RU" dirty="0"/>
+              <a:t>Вставка: Мы создаем новый узел и вешаем его на найденное место (как лист).</a:t>
+            </a:r>
+          </a:p>
+          <a:p>
+            <a:pPr marL="0" indent="0">
+              <a:buNone/>
+            </a:pPr>
+            <a:r>
+              <a:rPr lang="ru-RU" dirty="0"/>
+              <a:t>Подтягивание (</a:t>
+            </a:r>
+            <a:r>
+              <a:rPr lang="ru-RU" dirty="0" err="1"/>
+              <a:t>Splay</a:t>
+            </a:r>
+            <a:r>
+              <a:rPr lang="ru-RU" dirty="0"/>
+              <a:t>): Сразу после вставки мы берем этот </a:t>
+            </a:r>
+            <a:r>
+              <a:rPr lang="ru-RU" dirty="0" err="1"/>
+              <a:t>новосозданный</a:t>
+            </a:r>
+            <a:r>
+              <a:rPr lang="ru-RU" dirty="0"/>
+              <a:t> узел и поднимаем его в корень.</a:t>
+            </a:r>
+          </a:p>
+          <a:p>
+            <a:pPr marL="0" indent="0">
+              <a:buNone/>
+            </a:pPr>
+            <a:r>
+              <a:rPr lang="ru-RU" dirty="0"/>
+              <a:t>Результат: новый элемент сразу становится самым доступным (корнем). Если мы сейчас же захотим его найти или удалить, это займет минимум времени (1 шаг).</a:t>
+            </a:r>
+          </a:p>
+        </p:txBody>
+      </p:sp>
+    </p:spTree>
+    <p:extLst>
+      <p:ext uri="{BB962C8B-B14F-4D97-AF65-F5344CB8AC3E}">
+        <p14:creationId xmlns:p14="http://schemas.microsoft.com/office/powerpoint/2010/main" val="761111152"/>
+      </p:ext>
+    </p:extLst>
+  </p:cSld>
+  <p:clrMapOvr>
+    <a:masterClrMapping/>
+  </p:clrMapOvr>
+</p:sld>
+</file>
+
+<file path=ppt/slides/slide9.xml><?xml version="1.0" encoding="utf-8"?>
+<p:sld xmlns:a="http://schemas.openxmlformats.org/drawingml/2006/main" xmlns:r="http://schemas.openxmlformats.org/officeDocument/2006/relationships" xmlns:p="http://schemas.openxmlformats.org/presentationml/2006/main">
+  <p:cSld>
+    <p:spTree>
+      <p:nvGrpSpPr>
+        <p:cNvPr id="1" name=""/>
+        <p:cNvGrpSpPr/>
+        <p:nvPr/>
+      </p:nvGrpSpPr>
+      <p:grpSpPr>
+        <a:xfrm>
+          <a:off x="0" y="0"/>
+          <a:ext cx="0" cy="0"/>
+          <a:chOff x="0" y="0"/>
+          <a:chExt cx="0" cy="0"/>
+        </a:xfrm>
+      </p:grpSpPr>
+      <p:sp>
+        <p:nvSpPr>
+          <p:cNvPr id="2" name="Заголовок 1">
+            <a:extLst>
+              <a:ext uri="{FF2B5EF4-FFF2-40B4-BE49-F238E27FC236}">
+                <a16:creationId xmlns:a16="http://schemas.microsoft.com/office/drawing/2014/main" id="{9C53586E-FC61-4F8F-A9DC-C0A410D57891}"/>
+              </a:ext>
+            </a:extLst>
+          </p:cNvPr>
+          <p:cNvSpPr>
+            <a:spLocks noGrp="1"/>
+          </p:cNvSpPr>
+          <p:nvPr>
+            <p:ph type="title"/>
+          </p:nvPr>
+        </p:nvSpPr>
+        <p:spPr>
+          <a:xfrm>
+            <a:off x="762000" y="419100"/>
+            <a:ext cx="10668000" cy="1524000"/>
+          </a:xfrm>
+        </p:spPr>
+        <p:txBody>
+          <a:bodyPr/>
+          <a:lstStyle/>
+          <a:p>
+            <a:r>
+              <a:rPr lang="ru-RU" dirty="0"/>
+              <a:t>Удаление</a:t>
+            </a:r>
+            <a:r>
+              <a:rPr lang="ru-RU" b="1" i="0" u="none" strike="noStrike" dirty="0">
+                <a:solidFill>
+                  <a:srgbClr val="8BB4DD"/>
+                </a:solidFill>
+                <a:effectLst/>
+                <a:latin typeface="YS Text"/>
+                <a:hlinkClick r:id="rId2"/>
+              </a:rPr>
+              <a:t> 💅🏻</a:t>
+            </a:r>
+            <a:endParaRPr lang="ru-RU" dirty="0"/>
+          </a:p>
+        </p:txBody>
+      </p:sp>
+      <p:sp>
+        <p:nvSpPr>
+          <p:cNvPr id="3" name="Объект 2">
+            <a:extLst>
+              <a:ext uri="{FF2B5EF4-FFF2-40B4-BE49-F238E27FC236}">
+                <a16:creationId xmlns:a16="http://schemas.microsoft.com/office/drawing/2014/main" id="{3DC02F82-EBDF-4160-8997-6B9A80FE28CF}"/>
+              </a:ext>
+            </a:extLst>
+          </p:cNvPr>
+          <p:cNvSpPr>
+            <a:spLocks noGrp="1"/>
+          </p:cNvSpPr>
+          <p:nvPr>
+            <p:ph idx="1"/>
+          </p:nvPr>
+        </p:nvSpPr>
+        <p:spPr>
+          <a:xfrm>
+            <a:off x="762000" y="1519958"/>
+            <a:ext cx="10782300" cy="4918942"/>
+          </a:xfrm>
+        </p:spPr>
+        <p:txBody>
+          <a:bodyPr>
+            <a:normAutofit fontScale="70000" lnSpcReduction="20000"/>
+          </a:bodyPr>
+          <a:lstStyle/>
+          <a:p>
+            <a:pPr marL="0" indent="0">
+              <a:buNone/>
+            </a:pPr>
+            <a:r>
+              <a:rPr lang="ru-RU" dirty="0"/>
+              <a:t>Поиск и подъем: Сначала мы ищем удаляемый элемент. Как только находим, операция поиска автоматически поднимает его в корень. Теперь удаляемый элемент — это верхушка дерева.</a:t>
+            </a:r>
+          </a:p>
+          <a:p>
+            <a:pPr marL="0" indent="0">
+              <a:buNone/>
+            </a:pPr>
+            <a:r>
+              <a:rPr lang="ru-RU" dirty="0"/>
+              <a:t>Разрыв связей: Мы «отрезаем» корень. У нас остается два отдельных дерева: Левое (все числа меньше удаляемого) и Правое (все числа больше).</a:t>
+            </a:r>
+          </a:p>
+          <a:p>
+            <a:pPr marL="0" indent="0">
+              <a:buNone/>
+            </a:pPr>
+            <a:r>
+              <a:rPr lang="ru-RU" dirty="0"/>
+              <a:t>Поиск нового лидера: Нам нужно соединить Левое и Правое дерево. Для этого мы идем в Левое дерево и ищем там максимальный элемент (самый правый узел в левой ветке).</a:t>
+            </a:r>
+          </a:p>
+          <a:p>
+            <a:pPr marL="0" indent="0">
+              <a:buNone/>
+            </a:pPr>
+            <a:r>
+              <a:rPr lang="ru-RU" dirty="0"/>
+              <a:t>Подтягивание лидера: Мы поднимаем этот максимальный элемент в корень Левого дерева.</a:t>
+            </a:r>
+          </a:p>
+          <a:p>
+            <a:pPr marL="0" indent="0">
+              <a:buNone/>
+            </a:pPr>
+            <a:r>
+              <a:rPr lang="ru-RU" dirty="0"/>
+              <a:t>Важный нюанс: Так как это был максимальный элемент, у него гарантированно нет правого ребенка. Его правая рука свободна.</a:t>
+            </a:r>
+          </a:p>
+          <a:p>
+            <a:pPr marL="0" indent="0">
+              <a:buNone/>
+            </a:pPr>
+            <a:r>
+              <a:rPr lang="ru-RU" dirty="0"/>
+              <a:t>Склейка: Мы берем всё Правое дерево (от которого мы оторвали корень в шаге 2) и вешаем его на свободное правое место нашего нового лидера.</a:t>
+            </a:r>
+          </a:p>
+        </p:txBody>
+      </p:sp>
+    </p:spTree>
+    <p:extLst>
+      <p:ext uri="{BB962C8B-B14F-4D97-AF65-F5344CB8AC3E}">
+        <p14:creationId xmlns:p14="http://schemas.microsoft.com/office/powerpoint/2010/main" val="3824793567"/>
       </p:ext>
     </p:extLst>
   </p:cSld>
